--- a/NXProject_Intelligent_DevOps_Planning_EN.pptx
+++ b/NXProject_Intelligent_DevOps_Planning_EN.pptx
@@ -5396,7 +5396,8 @@
               </a:rPr>
               <a:t>• Automatic predecessor cascade
 • Virtual predecessor by resource
-• Calendar with holidays and working hours</a:t>
+• Calendar with holidays and working hours
+• %Daily column: expected pace by today</a:t>
             </a:r>
           </a:p>
         </p:txBody>
@@ -5715,8 +5716,9 @@
                 </a:solidFill>
               </a:rPr>
               <a:t>• Allocation by person and sprint
-• Overload alert (&gt;100%)
-• Schedule filter by person</a:t>
+• Discover and import people from DevOps
+• Cost per resource (import and compute)
+• Overload alert (&gt;100%)</a:t>
             </a:r>
           </a:p>
         </p:txBody>
@@ -5876,6 +5878,7 @@
               </a:rPr>
               <a:t>• Dates, hours, state, sprint, tags and predecessors
 • Creates new work items in DevOps
+• Tech Lead review: create/edit tasks online
 • Detailed synchronization report</a:t>
             </a:r>
           </a:p>
@@ -6035,8 +6038,8 @@
                 </a:solidFill>
               </a:rPr>
               <a:t>• Late activities (Finish &lt; today and % &lt; 100)
-• Items without owner
-• Circular dependencies and blockers</a:t>
+• %Daily vs reported % deviation
+• Items without owner and circular dependencies</a:t>
             </a:r>
           </a:p>
         </p:txBody>
@@ -9551,40 +9554,30 @@
           </a:p>
         </p:txBody>
       </p:sp>
-      <p:sp>
-        <p:nvSpPr>
-          <p:cNvPr id="8" name="TextBox 7"/>
-          <p:cNvSpPr txBox="1"/>
-          <p:nvPr/>
-        </p:nvSpPr>
-        <p:spPr>
-          <a:xfrm>
-            <a:off x="914400" y="6126480"/>
-            <a:ext cx="10332720" cy="365760"/>
-          </a:xfrm>
-          <a:prstGeom prst="rect">
-            <a:avLst/>
-          </a:prstGeom>
-          <a:noFill/>
-        </p:spPr>
-        <p:txBody>
-          <a:bodyPr wrap="square">
-            <a:spAutoFit/>
-          </a:bodyPr>
-          <a:lstStyle/>
-          <a:p>
-            <a:pPr algn="ctr"/>
-            <a:r>
-              <a:rPr sz="1100" b="0" i="0">
-                <a:solidFill>
-                  <a:srgbClr val="7A9AC8"/>
-                </a:solidFill>
-              </a:rPr>
-              <a:t>Nexus XData Tecnologia Ltda</a:t>
-            </a:r>
-          </a:p>
-        </p:txBody>
-      </p:sp>
+      <p:pic>
+        <p:nvPicPr>
+          <p:cNvPr id="8" name="Picture 7" descr="logo-nexus-xdata-transparent.png"/>
+          <p:cNvPicPr>
+            <a:picLocks noChangeAspect="1"/>
+          </p:cNvPicPr>
+          <p:nvPr/>
+        </p:nvPicPr>
+        <p:blipFill>
+          <a:blip r:embed="rId2"/>
+          <a:stretch>
+            <a:fillRect/>
+          </a:stretch>
+        </p:blipFill>
+        <p:spPr>
+          <a:xfrm>
+            <a:off x="5522976" y="5074920"/>
+            <a:ext cx="1143000" cy="1143000"/>
+          </a:xfrm>
+          <a:prstGeom prst="rect">
+            <a:avLst/>
+          </a:prstGeom>
+        </p:spPr>
+      </p:pic>
     </p:spTree>
   </p:cSld>
   <p:clrMapOvr>

--- a/NXProject_Intelligent_DevOps_Planning_EN.pptx
+++ b/NXProject_Intelligent_DevOps_Planning_EN.pptx
@@ -13,6 +13,7 @@
     <p:sldId id="261" r:id="rId12"/>
     <p:sldId id="262" r:id="rId13"/>
     <p:sldId id="263" r:id="rId14"/>
+    <p:sldId id="264" r:id="rId15"/>
   </p:sldIdLst>
   <p:sldSz cx="12188952" cy="6858000" type="screen4x3"/>
   <p:notesSz cx="6858000" cy="9144000"/>
@@ -4162,8 +4163,8 @@
         </p:nvSpPr>
         <p:spPr>
           <a:xfrm>
-            <a:off x="274320" y="2971800"/>
-            <a:ext cx="2194560" cy="3474720"/>
+            <a:off x="182880" y="2971800"/>
+            <a:ext cx="1874519" cy="3474720"/>
           </a:xfrm>
           <a:prstGeom prst="rect">
             <a:avLst/>
@@ -4207,8 +4208,8 @@
         </p:nvSpPr>
         <p:spPr>
           <a:xfrm>
-            <a:off x="274320" y="3154680"/>
-            <a:ext cx="2194560" cy="457200"/>
+            <a:off x="182880" y="3154680"/>
+            <a:ext cx="1874519" cy="457200"/>
           </a:xfrm>
           <a:prstGeom prst="rect">
             <a:avLst/>
@@ -4241,8 +4242,8 @@
         </p:nvSpPr>
         <p:spPr>
           <a:xfrm>
-            <a:off x="365760" y="3657600"/>
-            <a:ext cx="2011680" cy="685800"/>
+            <a:off x="274320" y="3657600"/>
+            <a:ext cx="1691639" cy="685800"/>
           </a:xfrm>
           <a:prstGeom prst="rect">
             <a:avLst/>
@@ -4276,8 +4277,8 @@
         </p:nvSpPr>
         <p:spPr>
           <a:xfrm>
-            <a:off x="411480" y="4434840"/>
-            <a:ext cx="1920240" cy="1737360"/>
+            <a:off x="320040" y="4434840"/>
+            <a:ext cx="1600199" cy="1737360"/>
           </a:xfrm>
           <a:prstGeom prst="rect">
             <a:avLst/>
@@ -4310,8 +4311,8 @@
         </p:nvSpPr>
         <p:spPr>
           <a:xfrm>
-            <a:off x="2615184" y="2971800"/>
-            <a:ext cx="2194560" cy="3474720"/>
+            <a:off x="2167128" y="2971800"/>
+            <a:ext cx="1874519" cy="3474720"/>
           </a:xfrm>
           <a:prstGeom prst="rect">
             <a:avLst/>
@@ -4355,8 +4356,8 @@
         </p:nvSpPr>
         <p:spPr>
           <a:xfrm>
-            <a:off x="2615184" y="3154680"/>
-            <a:ext cx="2194560" cy="457200"/>
+            <a:off x="2167128" y="3154680"/>
+            <a:ext cx="1874519" cy="457200"/>
           </a:xfrm>
           <a:prstGeom prst="rect">
             <a:avLst/>
@@ -4389,8 +4390,8 @@
         </p:nvSpPr>
         <p:spPr>
           <a:xfrm>
-            <a:off x="2706624" y="3657600"/>
-            <a:ext cx="2011680" cy="685800"/>
+            <a:off x="2258568" y="3657600"/>
+            <a:ext cx="1691639" cy="685800"/>
           </a:xfrm>
           <a:prstGeom prst="rect">
             <a:avLst/>
@@ -4424,8 +4425,8 @@
         </p:nvSpPr>
         <p:spPr>
           <a:xfrm>
-            <a:off x="2752344" y="4434840"/>
-            <a:ext cx="1920240" cy="1737360"/>
+            <a:off x="2304288" y="4434840"/>
+            <a:ext cx="1600199" cy="1737360"/>
           </a:xfrm>
           <a:prstGeom prst="rect">
             <a:avLst/>
@@ -4458,8 +4459,8 @@
         </p:nvSpPr>
         <p:spPr>
           <a:xfrm>
-            <a:off x="4956048" y="2971800"/>
-            <a:ext cx="2194560" cy="3474720"/>
+            <a:off x="4151376" y="2971800"/>
+            <a:ext cx="1874519" cy="3474720"/>
           </a:xfrm>
           <a:prstGeom prst="rect">
             <a:avLst/>
@@ -4503,8 +4504,8 @@
         </p:nvSpPr>
         <p:spPr>
           <a:xfrm>
-            <a:off x="4956048" y="3154680"/>
-            <a:ext cx="2194560" cy="457200"/>
+            <a:off x="4151376" y="3154680"/>
+            <a:ext cx="1874519" cy="457200"/>
           </a:xfrm>
           <a:prstGeom prst="rect">
             <a:avLst/>
@@ -4537,8 +4538,8 @@
         </p:nvSpPr>
         <p:spPr>
           <a:xfrm>
-            <a:off x="5047488" y="3657600"/>
-            <a:ext cx="2011680" cy="685800"/>
+            <a:off x="4242816" y="3657600"/>
+            <a:ext cx="1691639" cy="685800"/>
           </a:xfrm>
           <a:prstGeom prst="rect">
             <a:avLst/>
@@ -4572,8 +4573,8 @@
         </p:nvSpPr>
         <p:spPr>
           <a:xfrm>
-            <a:off x="5093208" y="4434840"/>
-            <a:ext cx="1920240" cy="1737360"/>
+            <a:off x="4288536" y="4434840"/>
+            <a:ext cx="1600199" cy="1737360"/>
           </a:xfrm>
           <a:prstGeom prst="rect">
             <a:avLst/>
@@ -4593,7 +4594,7 @@
                   <a:srgbClr val="555F6E"/>
                 </a:solidFill>
               </a:rPr>
-              <a:t>Bar, dependency, milestone and timeline view with adjustable zoom.</a:t>
+              <a:t>Bars, dependencies, milestones, critical path and baseline, with adjustable zoom.</a:t>
             </a:r>
           </a:p>
         </p:txBody>
@@ -4606,8 +4607,8 @@
         </p:nvSpPr>
         <p:spPr>
           <a:xfrm>
-            <a:off x="7296912" y="2971800"/>
-            <a:ext cx="2194560" cy="3474720"/>
+            <a:off x="6135624" y="2971800"/>
+            <a:ext cx="1874519" cy="3474720"/>
           </a:xfrm>
           <a:prstGeom prst="rect">
             <a:avLst/>
@@ -4651,8 +4652,8 @@
         </p:nvSpPr>
         <p:spPr>
           <a:xfrm>
-            <a:off x="7296912" y="3154680"/>
-            <a:ext cx="2194560" cy="457200"/>
+            <a:off x="6135624" y="3154680"/>
+            <a:ext cx="1874519" cy="457200"/>
           </a:xfrm>
           <a:prstGeom prst="rect">
             <a:avLst/>
@@ -4672,7 +4673,7 @@
                   <a:srgbClr val="2D2D2D"/>
                 </a:solidFill>
               </a:rPr>
-              <a:t>👥</a:t>
+              <a:t>🗂️</a:t>
             </a:r>
           </a:p>
         </p:txBody>
@@ -4685,8 +4686,8 @@
         </p:nvSpPr>
         <p:spPr>
           <a:xfrm>
-            <a:off x="7388352" y="3657600"/>
-            <a:ext cx="2011680" cy="685800"/>
+            <a:off x="6227064" y="3657600"/>
+            <a:ext cx="1691639" cy="685800"/>
           </a:xfrm>
           <a:prstGeom prst="rect">
             <a:avLst/>
@@ -4706,8 +4707,8 @@
                   <a:srgbClr val="1A3A6B"/>
                 </a:solidFill>
               </a:rPr>
-              <a:t>Resource
-management</a:t>
+              <a:t>Execution
+TaskBoard</a:t>
             </a:r>
           </a:p>
         </p:txBody>
@@ -4720,8 +4721,8 @@
         </p:nvSpPr>
         <p:spPr>
           <a:xfrm>
-            <a:off x="7434072" y="4434840"/>
-            <a:ext cx="1920240" cy="1737360"/>
+            <a:off x="6272784" y="4434840"/>
+            <a:ext cx="1600199" cy="1737360"/>
           </a:xfrm>
           <a:prstGeom prst="rect">
             <a:avLst/>
@@ -4741,7 +4742,7 @@
                   <a:srgbClr val="555F6E"/>
                 </a:solidFill>
               </a:rPr>
-              <a:t>Allocation view by person, overload detection and schedule conflict visibility.</a:t>
+              <a:t>Sprint Tasks by person and state; the team runs the day and the board writes to DevOps.</a:t>
             </a:r>
           </a:p>
         </p:txBody>
@@ -4754,8 +4755,8 @@
         </p:nvSpPr>
         <p:spPr>
           <a:xfrm>
-            <a:off x="9637776" y="2971800"/>
-            <a:ext cx="2194560" cy="3474720"/>
+            <a:off x="8119871" y="2971800"/>
+            <a:ext cx="1874519" cy="3474720"/>
           </a:xfrm>
           <a:prstGeom prst="rect">
             <a:avLst/>
@@ -4799,8 +4800,8 @@
         </p:nvSpPr>
         <p:spPr>
           <a:xfrm>
-            <a:off x="9637776" y="3154680"/>
-            <a:ext cx="2194560" cy="457200"/>
+            <a:off x="8119871" y="3154680"/>
+            <a:ext cx="1874519" cy="457200"/>
           </a:xfrm>
           <a:prstGeom prst="rect">
             <a:avLst/>
@@ -4820,7 +4821,7 @@
                   <a:srgbClr val="2D2D2D"/>
                 </a:solidFill>
               </a:rPr>
-              <a:t>🤖</a:t>
+              <a:t>👥</a:t>
             </a:r>
           </a:p>
         </p:txBody>
@@ -4833,8 +4834,8 @@
         </p:nvSpPr>
         <p:spPr>
           <a:xfrm>
-            <a:off x="9729216" y="3657600"/>
-            <a:ext cx="2011680" cy="685800"/>
+            <a:off x="8211311" y="3657600"/>
+            <a:ext cx="1691639" cy="685800"/>
           </a:xfrm>
           <a:prstGeom prst="rect">
             <a:avLst/>
@@ -4854,8 +4855,8 @@
                   <a:srgbClr val="1A3A6B"/>
                 </a:solidFill>
               </a:rPr>
-              <a:t>AI
-assistant</a:t>
+              <a:t>Resource
+management</a:t>
             </a:r>
           </a:p>
         </p:txBody>
@@ -4868,8 +4869,8 @@
         </p:nvSpPr>
         <p:spPr>
           <a:xfrm>
-            <a:off x="9774936" y="4434840"/>
-            <a:ext cx="1920240" cy="1737360"/>
+            <a:off x="8257031" y="4434840"/>
+            <a:ext cx="1600199" cy="1737360"/>
           </a:xfrm>
           <a:prstGeom prst="rect">
             <a:avLst/>
@@ -4889,7 +4890,155 @@
                   <a:srgbClr val="555F6E"/>
                 </a:solidFill>
               </a:rPr>
-              <a:t>Suggests task structures and story breakdown from free text.</a:t>
+              <a:t>Allocation by person, overload detection, allocation map and cost per resource.</a:t>
+            </a:r>
+          </a:p>
+        </p:txBody>
+      </p:sp>
+      <p:sp>
+        <p:nvSpPr>
+          <p:cNvPr id="28" name="Rectangle 27"/>
+          <p:cNvSpPr/>
+          <p:nvPr/>
+        </p:nvSpPr>
+        <p:spPr>
+          <a:xfrm>
+            <a:off x="10104119" y="2971800"/>
+            <a:ext cx="1874519" cy="3474720"/>
+          </a:xfrm>
+          <a:prstGeom prst="rect">
+            <a:avLst/>
+          </a:prstGeom>
+          <a:solidFill>
+            <a:srgbClr val="FFFFFF"/>
+          </a:solidFill>
+          <a:ln>
+            <a:solidFill>
+              <a:srgbClr val="FFFFFF"/>
+            </a:solidFill>
+          </a:ln>
+        </p:spPr>
+        <p:style>
+          <a:lnRef idx="1">
+            <a:schemeClr val="accent1"/>
+          </a:lnRef>
+          <a:fillRef idx="3">
+            <a:schemeClr val="accent1"/>
+          </a:fillRef>
+          <a:effectRef idx="2">
+            <a:schemeClr val="accent1"/>
+          </a:effectRef>
+          <a:fontRef idx="minor">
+            <a:schemeClr val="lt1"/>
+          </a:fontRef>
+        </p:style>
+        <p:txBody>
+          <a:bodyPr rtlCol="0" anchor="ctr"/>
+          <a:lstStyle/>
+          <a:p>
+            <a:pPr algn="ctr"/>
+          </a:p>
+        </p:txBody>
+      </p:sp>
+      <p:sp>
+        <p:nvSpPr>
+          <p:cNvPr id="29" name="TextBox 28"/>
+          <p:cNvSpPr txBox="1"/>
+          <p:nvPr/>
+        </p:nvSpPr>
+        <p:spPr>
+          <a:xfrm>
+            <a:off x="10104119" y="3154680"/>
+            <a:ext cx="1874519" cy="457200"/>
+          </a:xfrm>
+          <a:prstGeom prst="rect">
+            <a:avLst/>
+          </a:prstGeom>
+          <a:noFill/>
+        </p:spPr>
+        <p:txBody>
+          <a:bodyPr wrap="square">
+            <a:spAutoFit/>
+          </a:bodyPr>
+          <a:lstStyle/>
+          <a:p>
+            <a:pPr algn="ctr"/>
+            <a:r>
+              <a:rPr sz="2600" b="0" i="0">
+                <a:solidFill>
+                  <a:srgbClr val="2D2D2D"/>
+                </a:solidFill>
+              </a:rPr>
+              <a:t>🤖</a:t>
+            </a:r>
+          </a:p>
+        </p:txBody>
+      </p:sp>
+      <p:sp>
+        <p:nvSpPr>
+          <p:cNvPr id="30" name="TextBox 29"/>
+          <p:cNvSpPr txBox="1"/>
+          <p:nvPr/>
+        </p:nvSpPr>
+        <p:spPr>
+          <a:xfrm>
+            <a:off x="10195559" y="3657600"/>
+            <a:ext cx="1691639" cy="685800"/>
+          </a:xfrm>
+          <a:prstGeom prst="rect">
+            <a:avLst/>
+          </a:prstGeom>
+          <a:noFill/>
+        </p:spPr>
+        <p:txBody>
+          <a:bodyPr wrap="square">
+            <a:spAutoFit/>
+          </a:bodyPr>
+          <a:lstStyle/>
+          <a:p>
+            <a:pPr algn="ctr"/>
+            <a:r>
+              <a:rPr sz="1300" b="1" i="0">
+                <a:solidFill>
+                  <a:srgbClr val="1A3A6B"/>
+                </a:solidFill>
+              </a:rPr>
+              <a:t>Local or
+cloud AI</a:t>
+            </a:r>
+          </a:p>
+        </p:txBody>
+      </p:sp>
+      <p:sp>
+        <p:nvSpPr>
+          <p:cNvPr id="31" name="TextBox 30"/>
+          <p:cNvSpPr txBox="1"/>
+          <p:nvPr/>
+        </p:nvSpPr>
+        <p:spPr>
+          <a:xfrm>
+            <a:off x="10241279" y="4434840"/>
+            <a:ext cx="1600199" cy="1737360"/>
+          </a:xfrm>
+          <a:prstGeom prst="rect">
+            <a:avLst/>
+          </a:prstGeom>
+          <a:noFill/>
+        </p:spPr>
+        <p:txBody>
+          <a:bodyPr wrap="square">
+            <a:spAutoFit/>
+          </a:bodyPr>
+          <a:lstStyle/>
+          <a:p>
+            <a:pPr algn="ctr"/>
+            <a:r>
+              <a:rPr sz="1050" b="0" i="0">
+                <a:solidFill>
+                  <a:srgbClr val="555F6E"/>
+                </a:solidFill>
+              </a:rPr>
+              <a:t>Suggests task structures; the local model runs on your machine, sending no data out.</a:t>
             </a:r>
           </a:p>
         </p:txBody>
@@ -5076,7 +5225,7 @@
                   <a:srgbClr val="FFFFFF"/>
                 </a:solidFill>
               </a:rPr>
-              <a:t>Key features</a:t>
+              <a:t>Planning philosophy: degrees of freedom</a:t>
             </a:r>
           </a:p>
         </p:txBody>
@@ -5089,8 +5238,121 @@
         </p:nvSpPr>
         <p:spPr>
           <a:xfrm>
-            <a:off x="365760" y="1417320"/>
-            <a:ext cx="3657600" cy="2377440"/>
+            <a:off x="457200" y="1371600"/>
+            <a:ext cx="11247120" cy="1234440"/>
+          </a:xfrm>
+          <a:prstGeom prst="rect">
+            <a:avLst/>
+          </a:prstGeom>
+          <a:solidFill>
+            <a:srgbClr val="2B579A"/>
+          </a:solidFill>
+          <a:ln>
+            <a:solidFill>
+              <a:srgbClr val="2B579A"/>
+            </a:solidFill>
+          </a:ln>
+        </p:spPr>
+        <p:style>
+          <a:lnRef idx="1">
+            <a:schemeClr val="accent1"/>
+          </a:lnRef>
+          <a:fillRef idx="3">
+            <a:schemeClr val="accent1"/>
+          </a:fillRef>
+          <a:effectRef idx="2">
+            <a:schemeClr val="accent1"/>
+          </a:effectRef>
+          <a:fontRef idx="minor">
+            <a:schemeClr val="lt1"/>
+          </a:fontRef>
+        </p:style>
+        <p:txBody>
+          <a:bodyPr rtlCol="0" anchor="ctr"/>
+          <a:lstStyle/>
+          <a:p>
+            <a:pPr algn="ctr"/>
+          </a:p>
+        </p:txBody>
+      </p:sp>
+      <p:sp>
+        <p:nvSpPr>
+          <p:cNvPr id="7" name="TextBox 6"/>
+          <p:cNvSpPr txBox="1"/>
+          <p:nvPr/>
+        </p:nvSpPr>
+        <p:spPr>
+          <a:xfrm>
+            <a:off x="731520" y="1481328"/>
+            <a:ext cx="10698480" cy="1005840"/>
+          </a:xfrm>
+          <a:prstGeom prst="rect">
+            <a:avLst/>
+          </a:prstGeom>
+          <a:noFill/>
+        </p:spPr>
+        <p:txBody>
+          <a:bodyPr wrap="square">
+            <a:spAutoFit/>
+          </a:bodyPr>
+          <a:lstStyle/>
+          <a:p>
+            <a:pPr algn="ctr"/>
+            <a:r>
+              <a:rPr sz="1400" b="0" i="0">
+                <a:solidFill>
+                  <a:srgbClr val="FFFFFF"/>
+                </a:solidFill>
+              </a:rPr>
+              <a:t>NXProject plans down to the Story level. Tasks can be pulled into the schedule, but the intent is for the team to detail and create them during execution, supported by the TaskBoard — which brings more agility to the project.</a:t>
+            </a:r>
+          </a:p>
+        </p:txBody>
+      </p:sp>
+      <p:sp>
+        <p:nvSpPr>
+          <p:cNvPr id="8" name="TextBox 7"/>
+          <p:cNvSpPr txBox="1"/>
+          <p:nvPr/>
+        </p:nvSpPr>
+        <p:spPr>
+          <a:xfrm>
+            <a:off x="457200" y="2788920"/>
+            <a:ext cx="11247120" cy="548640"/>
+          </a:xfrm>
+          <a:prstGeom prst="rect">
+            <a:avLst/>
+          </a:prstGeom>
+          <a:noFill/>
+        </p:spPr>
+        <p:txBody>
+          <a:bodyPr wrap="square">
+            <a:spAutoFit/>
+          </a:bodyPr>
+          <a:lstStyle/>
+          <a:p>
+            <a:pPr algn="ctr"/>
+            <a:r>
+              <a:rPr sz="1200" b="0" i="1">
+                <a:solidFill>
+                  <a:srgbClr val="555F6E"/>
+                </a:solidFill>
+              </a:rPr>
+              <a:t>Inspired by the mathematical concept of degrees of freedom: define the boundaries of the system without constraining the movement inside them.</a:t>
+            </a:r>
+          </a:p>
+        </p:txBody>
+      </p:sp>
+      <p:sp>
+        <p:nvSpPr>
+          <p:cNvPr id="9" name="Rectangle 8"/>
+          <p:cNvSpPr/>
+          <p:nvPr/>
+        </p:nvSpPr>
+        <p:spPr>
+          <a:xfrm>
+            <a:off x="457200" y="3611880"/>
+            <a:ext cx="3566160" cy="2377440"/>
           </a:xfrm>
           <a:prstGeom prst="rect">
             <a:avLst/>
@@ -5128,24 +5390,24 @@
       </p:sp>
       <p:sp>
         <p:nvSpPr>
-          <p:cNvPr id="7" name="Rectangle 6"/>
+          <p:cNvPr id="10" name="Rectangle 9"/>
           <p:cNvSpPr/>
           <p:nvPr/>
         </p:nvSpPr>
         <p:spPr>
           <a:xfrm>
-            <a:off x="365760" y="1417320"/>
-            <a:ext cx="3657600" cy="411480"/>
+            <a:off x="457200" y="3611880"/>
+            <a:ext cx="3566160" cy="54864"/>
           </a:xfrm>
           <a:prstGeom prst="rect">
             <a:avLst/>
           </a:prstGeom>
           <a:solidFill>
-            <a:srgbClr val="2B579A"/>
+            <a:srgbClr val="E87B00"/>
           </a:solidFill>
           <a:ln>
             <a:solidFill>
-              <a:srgbClr val="2B579A"/>
+              <a:srgbClr val="E87B00"/>
             </a:solidFill>
           </a:ln>
         </p:spPr>
@@ -5173,14 +5435,14 @@
       </p:sp>
       <p:sp>
         <p:nvSpPr>
-          <p:cNvPr id="8" name="TextBox 7"/>
+          <p:cNvPr id="11" name="TextBox 10"/>
           <p:cNvSpPr txBox="1"/>
           <p:nvPr/>
         </p:nvSpPr>
         <p:spPr>
           <a:xfrm>
-            <a:off x="502920" y="1463040"/>
-            <a:ext cx="3474720" cy="347472"/>
+            <a:off x="640080" y="3840480"/>
+            <a:ext cx="3200400" cy="457200"/>
           </a:xfrm>
           <a:prstGeom prst="rect">
             <a:avLst/>
@@ -5193,28 +5455,28 @@
           </a:bodyPr>
           <a:lstStyle/>
           <a:p>
-            <a:pPr algn="l"/>
-            <a:r>
-              <a:rPr sz="1200" b="1" i="0">
-                <a:solidFill>
-                  <a:srgbClr val="FFFFFF"/>
+            <a:pPr algn="ctr"/>
+            <a:r>
+              <a:rPr sz="1300" b="1" i="0">
+                <a:solidFill>
+                  <a:srgbClr val="1A3A6B"/>
                 </a:solidFill>
               </a:rPr>
-              <a:t>Azure DevOps import</a:t>
-            </a:r>
-          </a:p>
-        </p:txBody>
-      </p:sp>
-      <p:sp>
-        <p:nvSpPr>
-          <p:cNvPr id="9" name="TextBox 8"/>
+              <a:t>Management sets the boundaries</a:t>
+            </a:r>
+          </a:p>
+        </p:txBody>
+      </p:sp>
+      <p:sp>
+        <p:nvSpPr>
+          <p:cNvPr id="12" name="TextBox 11"/>
           <p:cNvSpPr txBox="1"/>
           <p:nvPr/>
         </p:nvSpPr>
         <p:spPr>
           <a:xfrm>
-            <a:off x="502920" y="1892808"/>
-            <a:ext cx="3429000" cy="1828800"/>
+            <a:off x="640080" y="4526280"/>
+            <a:ext cx="3200400" cy="1371600"/>
           </a:xfrm>
           <a:prstGeom prst="rect">
             <a:avLst/>
@@ -5227,30 +5489,29 @@
           </a:bodyPr>
           <a:lstStyle/>
           <a:p>
-            <a:pPr algn="l"/>
-            <a:r>
-              <a:rPr sz="1050" b="0" i="0">
+            <a:pPr algn="ctr"/>
+            <a:r>
+              <a:rPr sz="1100" b="0" i="0">
                 <a:solidFill>
                   <a:srgbClr val="555F6E"/>
                 </a:solidFill>
               </a:rPr>
-              <a:t>• Project → Epic → Feature → Story hierarchy
-• Estimates, dates, sprints and owners
-• Predecessors and blockers (Block tag)</a:t>
-            </a:r>
-          </a:p>
-        </p:txBody>
-      </p:sp>
-      <p:sp>
-        <p:nvSpPr>
-          <p:cNvPr id="10" name="Rectangle 9"/>
+              <a:t>Dates, resources, dependencies and priority — at Epic, Feature and Story level.
+That is what holds deadline, capacity and risk together.</a:t>
+            </a:r>
+          </a:p>
+        </p:txBody>
+      </p:sp>
+      <p:sp>
+        <p:nvSpPr>
+          <p:cNvPr id="13" name="Rectangle 12"/>
           <p:cNvSpPr/>
           <p:nvPr/>
         </p:nvSpPr>
         <p:spPr>
           <a:xfrm>
-            <a:off x="4297680" y="1417320"/>
-            <a:ext cx="3657600" cy="2377440"/>
+            <a:off x="4297680" y="3611880"/>
+            <a:ext cx="3566160" cy="2377440"/>
           </a:xfrm>
           <a:prstGeom prst="rect">
             <a:avLst/>
@@ -5288,24 +5549,24 @@
       </p:sp>
       <p:sp>
         <p:nvSpPr>
-          <p:cNvPr id="11" name="Rectangle 10"/>
+          <p:cNvPr id="14" name="Rectangle 13"/>
           <p:cNvSpPr/>
           <p:nvPr/>
         </p:nvSpPr>
         <p:spPr>
           <a:xfrm>
-            <a:off x="4297680" y="1417320"/>
-            <a:ext cx="3657600" cy="411480"/>
+            <a:off x="4297680" y="3611880"/>
+            <a:ext cx="3566160" cy="54864"/>
           </a:xfrm>
           <a:prstGeom prst="rect">
             <a:avLst/>
           </a:prstGeom>
           <a:solidFill>
-            <a:srgbClr val="2B579A"/>
+            <a:srgbClr val="E87B00"/>
           </a:solidFill>
           <a:ln>
             <a:solidFill>
-              <a:srgbClr val="2B579A"/>
+              <a:srgbClr val="E87B00"/>
             </a:solidFill>
           </a:ln>
         </p:spPr>
@@ -5333,14 +5594,14 @@
       </p:sp>
       <p:sp>
         <p:nvSpPr>
-          <p:cNvPr id="12" name="TextBox 11"/>
+          <p:cNvPr id="15" name="TextBox 14"/>
           <p:cNvSpPr txBox="1"/>
           <p:nvPr/>
         </p:nvSpPr>
         <p:spPr>
           <a:xfrm>
-            <a:off x="4434840" y="1463040"/>
-            <a:ext cx="3474720" cy="347472"/>
+            <a:off x="4480560" y="3840480"/>
+            <a:ext cx="3200400" cy="457200"/>
           </a:xfrm>
           <a:prstGeom prst="rect">
             <a:avLst/>
@@ -5353,28 +5614,28 @@
           </a:bodyPr>
           <a:lstStyle/>
           <a:p>
-            <a:pPr algn="l"/>
-            <a:r>
-              <a:rPr sz="1200" b="1" i="0">
-                <a:solidFill>
-                  <a:srgbClr val="FFFFFF"/>
+            <a:pPr algn="ctr"/>
+            <a:r>
+              <a:rPr sz="1300" b="1" i="0">
+                <a:solidFill>
+                  <a:srgbClr val="1A3A6B"/>
                 </a:solidFill>
               </a:rPr>
-              <a:t>Smart schedule</a:t>
-            </a:r>
-          </a:p>
-        </p:txBody>
-      </p:sp>
-      <p:sp>
-        <p:nvSpPr>
-          <p:cNvPr id="13" name="TextBox 12"/>
+              <a:t>The team moves inside them</a:t>
+            </a:r>
+          </a:p>
+        </p:txBody>
+      </p:sp>
+      <p:sp>
+        <p:nvSpPr>
+          <p:cNvPr id="16" name="TextBox 15"/>
           <p:cNvSpPr txBox="1"/>
           <p:nvPr/>
         </p:nvSpPr>
         <p:spPr>
           <a:xfrm>
-            <a:off x="4434840" y="1892808"/>
-            <a:ext cx="3429000" cy="1828800"/>
+            <a:off x="4480560" y="4526280"/>
+            <a:ext cx="3200400" cy="1371600"/>
           </a:xfrm>
           <a:prstGeom prst="rect">
             <a:avLst/>
@@ -5387,31 +5648,29 @@
           </a:bodyPr>
           <a:lstStyle/>
           <a:p>
-            <a:pPr algn="l"/>
-            <a:r>
-              <a:rPr sz="1050" b="0" i="0">
+            <a:pPr algn="ctr"/>
+            <a:r>
+              <a:rPr sz="1100" b="0" i="0">
                 <a:solidFill>
                   <a:srgbClr val="555F6E"/>
                 </a:solidFill>
               </a:rPr>
-              <a:t>• Automatic predecessor cascade
-• Virtual predecessor by resource
-• Calendar with holidays and working hours
-• %Daily column: expected pace by today</a:t>
-            </a:r>
-          </a:p>
-        </p:txBody>
-      </p:sp>
-      <p:sp>
-        <p:nvSpPr>
-          <p:cNvPr id="14" name="Rectangle 13"/>
+              <a:t>Tasks are born in execution, with the people doing the work: breakdown, sequence
+and fine tuning happen in the TaskBoard, with no replanning round trip.</a:t>
+            </a:r>
+          </a:p>
+        </p:txBody>
+      </p:sp>
+      <p:sp>
+        <p:nvSpPr>
+          <p:cNvPr id="17" name="Rectangle 16"/>
           <p:cNvSpPr/>
           <p:nvPr/>
         </p:nvSpPr>
         <p:spPr>
           <a:xfrm>
-            <a:off x="8229600" y="1417320"/>
-            <a:ext cx="3657600" cy="2377440"/>
+            <a:off x="8138160" y="3611880"/>
+            <a:ext cx="3566160" cy="2377440"/>
           </a:xfrm>
           <a:prstGeom prst="rect">
             <a:avLst/>
@@ -5449,24 +5708,24 @@
       </p:sp>
       <p:sp>
         <p:nvSpPr>
-          <p:cNvPr id="15" name="Rectangle 14"/>
+          <p:cNvPr id="18" name="Rectangle 17"/>
           <p:cNvSpPr/>
           <p:nvPr/>
         </p:nvSpPr>
         <p:spPr>
           <a:xfrm>
-            <a:off x="8229600" y="1417320"/>
-            <a:ext cx="3657600" cy="411480"/>
+            <a:off x="8138160" y="3611880"/>
+            <a:ext cx="3566160" cy="54864"/>
           </a:xfrm>
           <a:prstGeom prst="rect">
             <a:avLst/>
           </a:prstGeom>
           <a:solidFill>
-            <a:srgbClr val="2B579A"/>
+            <a:srgbClr val="E87B00"/>
           </a:solidFill>
           <a:ln>
             <a:solidFill>
-              <a:srgbClr val="2B579A"/>
+              <a:srgbClr val="E87B00"/>
             </a:solidFill>
           </a:ln>
         </p:spPr>
@@ -5494,14 +5753,14 @@
       </p:sp>
       <p:sp>
         <p:nvSpPr>
-          <p:cNvPr id="16" name="TextBox 15"/>
+          <p:cNvPr id="19" name="TextBox 18"/>
           <p:cNvSpPr txBox="1"/>
           <p:nvPr/>
         </p:nvSpPr>
         <p:spPr>
           <a:xfrm>
-            <a:off x="8366760" y="1463040"/>
-            <a:ext cx="3474720" cy="347472"/>
+            <a:off x="8321040" y="3840480"/>
+            <a:ext cx="3200400" cy="457200"/>
           </a:xfrm>
           <a:prstGeom prst="rect">
             <a:avLst/>
@@ -5514,28 +5773,28 @@
           </a:bodyPr>
           <a:lstStyle/>
           <a:p>
-            <a:pPr algn="l"/>
-            <a:r>
-              <a:rPr sz="1200" b="1" i="0">
-                <a:solidFill>
-                  <a:srgbClr val="FFFFFF"/>
+            <a:pPr algn="ctr"/>
+            <a:r>
+              <a:rPr sz="1300" b="1" i="0">
+                <a:solidFill>
+                  <a:srgbClr val="1A3A6B"/>
                 </a:solidFill>
               </a:rPr>
-              <a:t>Gantt chart</a:t>
-            </a:r>
-          </a:p>
-        </p:txBody>
-      </p:sp>
-      <p:sp>
-        <p:nvSpPr>
-          <p:cNvPr id="17" name="TextBox 16"/>
+              <a:t>Both sides see the same thing</a:t>
+            </a:r>
+          </a:p>
+        </p:txBody>
+      </p:sp>
+      <p:sp>
+        <p:nvSpPr>
+          <p:cNvPr id="20" name="TextBox 19"/>
           <p:cNvSpPr txBox="1"/>
           <p:nvPr/>
         </p:nvSpPr>
         <p:spPr>
           <a:xfrm>
-            <a:off x="8366760" y="1892808"/>
-            <a:ext cx="3429000" cy="1828800"/>
+            <a:off x="8321040" y="4526280"/>
+            <a:ext cx="3200400" cy="1371600"/>
           </a:xfrm>
           <a:prstGeom prst="rect">
             <a:avLst/>
@@ -5548,498 +5807,15 @@
           </a:bodyPr>
           <a:lstStyle/>
           <a:p>
-            <a:pPr algn="l"/>
-            <a:r>
-              <a:rPr sz="1050" b="0" i="0">
+            <a:pPr algn="ctr"/>
+            <a:r>
+              <a:rPr sz="1100" b="0" i="0">
                 <a:solidFill>
                   <a:srgbClr val="555F6E"/>
                 </a:solidFill>
               </a:rPr>
-              <a:t>• Bars, milestones and dependency arrows
-• Zoom: Day, Week, Sprint, Month, Quarter
-• Drag to visually replan</a:t>
-            </a:r>
-          </a:p>
-        </p:txBody>
-      </p:sp>
-      <p:sp>
-        <p:nvSpPr>
-          <p:cNvPr id="18" name="Rectangle 17"/>
-          <p:cNvSpPr/>
-          <p:nvPr/>
-        </p:nvSpPr>
-        <p:spPr>
-          <a:xfrm>
-            <a:off x="365760" y="4023360"/>
-            <a:ext cx="3657600" cy="2377440"/>
-          </a:xfrm>
-          <a:prstGeom prst="rect">
-            <a:avLst/>
-          </a:prstGeom>
-          <a:solidFill>
-            <a:srgbClr val="FFFFFF"/>
-          </a:solidFill>
-          <a:ln>
-            <a:solidFill>
-              <a:srgbClr val="FFFFFF"/>
-            </a:solidFill>
-          </a:ln>
-        </p:spPr>
-        <p:style>
-          <a:lnRef idx="1">
-            <a:schemeClr val="accent1"/>
-          </a:lnRef>
-          <a:fillRef idx="3">
-            <a:schemeClr val="accent1"/>
-          </a:fillRef>
-          <a:effectRef idx="2">
-            <a:schemeClr val="accent1"/>
-          </a:effectRef>
-          <a:fontRef idx="minor">
-            <a:schemeClr val="lt1"/>
-          </a:fontRef>
-        </p:style>
-        <p:txBody>
-          <a:bodyPr rtlCol="0" anchor="ctr"/>
-          <a:lstStyle/>
-          <a:p>
-            <a:pPr algn="ctr"/>
-          </a:p>
-        </p:txBody>
-      </p:sp>
-      <p:sp>
-        <p:nvSpPr>
-          <p:cNvPr id="19" name="Rectangle 18"/>
-          <p:cNvSpPr/>
-          <p:nvPr/>
-        </p:nvSpPr>
-        <p:spPr>
-          <a:xfrm>
-            <a:off x="365760" y="4023360"/>
-            <a:ext cx="3657600" cy="411480"/>
-          </a:xfrm>
-          <a:prstGeom prst="rect">
-            <a:avLst/>
-          </a:prstGeom>
-          <a:solidFill>
-            <a:srgbClr val="2B579A"/>
-          </a:solidFill>
-          <a:ln>
-            <a:solidFill>
-              <a:srgbClr val="2B579A"/>
-            </a:solidFill>
-          </a:ln>
-        </p:spPr>
-        <p:style>
-          <a:lnRef idx="1">
-            <a:schemeClr val="accent1"/>
-          </a:lnRef>
-          <a:fillRef idx="3">
-            <a:schemeClr val="accent1"/>
-          </a:fillRef>
-          <a:effectRef idx="2">
-            <a:schemeClr val="accent1"/>
-          </a:effectRef>
-          <a:fontRef idx="minor">
-            <a:schemeClr val="lt1"/>
-          </a:fontRef>
-        </p:style>
-        <p:txBody>
-          <a:bodyPr rtlCol="0" anchor="ctr"/>
-          <a:lstStyle/>
-          <a:p>
-            <a:pPr algn="ctr"/>
-          </a:p>
-        </p:txBody>
-      </p:sp>
-      <p:sp>
-        <p:nvSpPr>
-          <p:cNvPr id="20" name="TextBox 19"/>
-          <p:cNvSpPr txBox="1"/>
-          <p:nvPr/>
-        </p:nvSpPr>
-        <p:spPr>
-          <a:xfrm>
-            <a:off x="502920" y="4069080"/>
-            <a:ext cx="3474720" cy="347472"/>
-          </a:xfrm>
-          <a:prstGeom prst="rect">
-            <a:avLst/>
-          </a:prstGeom>
-          <a:noFill/>
-        </p:spPr>
-        <p:txBody>
-          <a:bodyPr wrap="square">
-            <a:spAutoFit/>
-          </a:bodyPr>
-          <a:lstStyle/>
-          <a:p>
-            <a:pPr algn="l"/>
-            <a:r>
-              <a:rPr sz="1200" b="1" i="0">
-                <a:solidFill>
-                  <a:srgbClr val="FFFFFF"/>
-                </a:solidFill>
-              </a:rPr>
-              <a:t>Resource management</a:t>
-            </a:r>
-          </a:p>
-        </p:txBody>
-      </p:sp>
-      <p:sp>
-        <p:nvSpPr>
-          <p:cNvPr id="21" name="TextBox 20"/>
-          <p:cNvSpPr txBox="1"/>
-          <p:nvPr/>
-        </p:nvSpPr>
-        <p:spPr>
-          <a:xfrm>
-            <a:off x="502920" y="4498848"/>
-            <a:ext cx="3429000" cy="1828800"/>
-          </a:xfrm>
-          <a:prstGeom prst="rect">
-            <a:avLst/>
-          </a:prstGeom>
-          <a:noFill/>
-        </p:spPr>
-        <p:txBody>
-          <a:bodyPr wrap="square">
-            <a:spAutoFit/>
-          </a:bodyPr>
-          <a:lstStyle/>
-          <a:p>
-            <a:pPr algn="l"/>
-            <a:r>
-              <a:rPr sz="1050" b="0" i="0">
-                <a:solidFill>
-                  <a:srgbClr val="555F6E"/>
-                </a:solidFill>
-              </a:rPr>
-              <a:t>• Allocation by person and sprint
-• Discover and import people from DevOps
-• Cost per resource (import and compute)
-• Overload alert (&gt;100%)</a:t>
-            </a:r>
-          </a:p>
-        </p:txBody>
-      </p:sp>
-      <p:sp>
-        <p:nvSpPr>
-          <p:cNvPr id="22" name="Rectangle 21"/>
-          <p:cNvSpPr/>
-          <p:nvPr/>
-        </p:nvSpPr>
-        <p:spPr>
-          <a:xfrm>
-            <a:off x="4297680" y="4023360"/>
-            <a:ext cx="3657600" cy="2377440"/>
-          </a:xfrm>
-          <a:prstGeom prst="rect">
-            <a:avLst/>
-          </a:prstGeom>
-          <a:solidFill>
-            <a:srgbClr val="FFFFFF"/>
-          </a:solidFill>
-          <a:ln>
-            <a:solidFill>
-              <a:srgbClr val="FFFFFF"/>
-            </a:solidFill>
-          </a:ln>
-        </p:spPr>
-        <p:style>
-          <a:lnRef idx="1">
-            <a:schemeClr val="accent1"/>
-          </a:lnRef>
-          <a:fillRef idx="3">
-            <a:schemeClr val="accent1"/>
-          </a:fillRef>
-          <a:effectRef idx="2">
-            <a:schemeClr val="accent1"/>
-          </a:effectRef>
-          <a:fontRef idx="minor">
-            <a:schemeClr val="lt1"/>
-          </a:fontRef>
-        </p:style>
-        <p:txBody>
-          <a:bodyPr rtlCol="0" anchor="ctr"/>
-          <a:lstStyle/>
-          <a:p>
-            <a:pPr algn="ctr"/>
-          </a:p>
-        </p:txBody>
-      </p:sp>
-      <p:sp>
-        <p:nvSpPr>
-          <p:cNvPr id="23" name="Rectangle 22"/>
-          <p:cNvSpPr/>
-          <p:nvPr/>
-        </p:nvSpPr>
-        <p:spPr>
-          <a:xfrm>
-            <a:off x="4297680" y="4023360"/>
-            <a:ext cx="3657600" cy="411480"/>
-          </a:xfrm>
-          <a:prstGeom prst="rect">
-            <a:avLst/>
-          </a:prstGeom>
-          <a:solidFill>
-            <a:srgbClr val="2B579A"/>
-          </a:solidFill>
-          <a:ln>
-            <a:solidFill>
-              <a:srgbClr val="2B579A"/>
-            </a:solidFill>
-          </a:ln>
-        </p:spPr>
-        <p:style>
-          <a:lnRef idx="1">
-            <a:schemeClr val="accent1"/>
-          </a:lnRef>
-          <a:fillRef idx="3">
-            <a:schemeClr val="accent1"/>
-          </a:fillRef>
-          <a:effectRef idx="2">
-            <a:schemeClr val="accent1"/>
-          </a:effectRef>
-          <a:fontRef idx="minor">
-            <a:schemeClr val="lt1"/>
-          </a:fontRef>
-        </p:style>
-        <p:txBody>
-          <a:bodyPr rtlCol="0" anchor="ctr"/>
-          <a:lstStyle/>
-          <a:p>
-            <a:pPr algn="ctr"/>
-          </a:p>
-        </p:txBody>
-      </p:sp>
-      <p:sp>
-        <p:nvSpPr>
-          <p:cNvPr id="24" name="TextBox 23"/>
-          <p:cNvSpPr txBox="1"/>
-          <p:nvPr/>
-        </p:nvSpPr>
-        <p:spPr>
-          <a:xfrm>
-            <a:off x="4434840" y="4069080"/>
-            <a:ext cx="3474720" cy="347472"/>
-          </a:xfrm>
-          <a:prstGeom prst="rect">
-            <a:avLst/>
-          </a:prstGeom>
-          <a:noFill/>
-        </p:spPr>
-        <p:txBody>
-          <a:bodyPr wrap="square">
-            <a:spAutoFit/>
-          </a:bodyPr>
-          <a:lstStyle/>
-          <a:p>
-            <a:pPr algn="l"/>
-            <a:r>
-              <a:rPr sz="1200" b="1" i="0">
-                <a:solidFill>
-                  <a:srgbClr val="FFFFFF"/>
-                </a:solidFill>
-              </a:rPr>
-              <a:t>Bidirectional sync</a:t>
-            </a:r>
-          </a:p>
-        </p:txBody>
-      </p:sp>
-      <p:sp>
-        <p:nvSpPr>
-          <p:cNvPr id="25" name="TextBox 24"/>
-          <p:cNvSpPr txBox="1"/>
-          <p:nvPr/>
-        </p:nvSpPr>
-        <p:spPr>
-          <a:xfrm>
-            <a:off x="4434840" y="4498848"/>
-            <a:ext cx="3429000" cy="1828800"/>
-          </a:xfrm>
-          <a:prstGeom prst="rect">
-            <a:avLst/>
-          </a:prstGeom>
-          <a:noFill/>
-        </p:spPr>
-        <p:txBody>
-          <a:bodyPr wrap="square">
-            <a:spAutoFit/>
-          </a:bodyPr>
-          <a:lstStyle/>
-          <a:p>
-            <a:pPr algn="l"/>
-            <a:r>
-              <a:rPr sz="1050" b="0" i="0">
-                <a:solidFill>
-                  <a:srgbClr val="555F6E"/>
-                </a:solidFill>
-              </a:rPr>
-              <a:t>• Dates, hours, state, sprint, tags and predecessors
-• Creates new work items in DevOps
-• Tech Lead review: create/edit tasks online
-• Detailed synchronization report</a:t>
-            </a:r>
-          </a:p>
-        </p:txBody>
-      </p:sp>
-      <p:sp>
-        <p:nvSpPr>
-          <p:cNvPr id="26" name="Rectangle 25"/>
-          <p:cNvSpPr/>
-          <p:nvPr/>
-        </p:nvSpPr>
-        <p:spPr>
-          <a:xfrm>
-            <a:off x="8229600" y="4023360"/>
-            <a:ext cx="3657600" cy="2377440"/>
-          </a:xfrm>
-          <a:prstGeom prst="rect">
-            <a:avLst/>
-          </a:prstGeom>
-          <a:solidFill>
-            <a:srgbClr val="FFFFFF"/>
-          </a:solidFill>
-          <a:ln>
-            <a:solidFill>
-              <a:srgbClr val="FFFFFF"/>
-            </a:solidFill>
-          </a:ln>
-        </p:spPr>
-        <p:style>
-          <a:lnRef idx="1">
-            <a:schemeClr val="accent1"/>
-          </a:lnRef>
-          <a:fillRef idx="3">
-            <a:schemeClr val="accent1"/>
-          </a:fillRef>
-          <a:effectRef idx="2">
-            <a:schemeClr val="accent1"/>
-          </a:effectRef>
-          <a:fontRef idx="minor">
-            <a:schemeClr val="lt1"/>
-          </a:fontRef>
-        </p:style>
-        <p:txBody>
-          <a:bodyPr rtlCol="0" anchor="ctr"/>
-          <a:lstStyle/>
-          <a:p>
-            <a:pPr algn="ctr"/>
-          </a:p>
-        </p:txBody>
-      </p:sp>
-      <p:sp>
-        <p:nvSpPr>
-          <p:cNvPr id="27" name="Rectangle 26"/>
-          <p:cNvSpPr/>
-          <p:nvPr/>
-        </p:nvSpPr>
-        <p:spPr>
-          <a:xfrm>
-            <a:off x="8229600" y="4023360"/>
-            <a:ext cx="3657600" cy="411480"/>
-          </a:xfrm>
-          <a:prstGeom prst="rect">
-            <a:avLst/>
-          </a:prstGeom>
-          <a:solidFill>
-            <a:srgbClr val="2B579A"/>
-          </a:solidFill>
-          <a:ln>
-            <a:solidFill>
-              <a:srgbClr val="2B579A"/>
-            </a:solidFill>
-          </a:ln>
-        </p:spPr>
-        <p:style>
-          <a:lnRef idx="1">
-            <a:schemeClr val="accent1"/>
-          </a:lnRef>
-          <a:fillRef idx="3">
-            <a:schemeClr val="accent1"/>
-          </a:fillRef>
-          <a:effectRef idx="2">
-            <a:schemeClr val="accent1"/>
-          </a:effectRef>
-          <a:fontRef idx="minor">
-            <a:schemeClr val="lt1"/>
-          </a:fontRef>
-        </p:style>
-        <p:txBody>
-          <a:bodyPr rtlCol="0" anchor="ctr"/>
-          <a:lstStyle/>
-          <a:p>
-            <a:pPr algn="ctr"/>
-          </a:p>
-        </p:txBody>
-      </p:sp>
-      <p:sp>
-        <p:nvSpPr>
-          <p:cNvPr id="28" name="TextBox 27"/>
-          <p:cNvSpPr txBox="1"/>
-          <p:nvPr/>
-        </p:nvSpPr>
-        <p:spPr>
-          <a:xfrm>
-            <a:off x="8366760" y="4069080"/>
-            <a:ext cx="3474720" cy="347472"/>
-          </a:xfrm>
-          <a:prstGeom prst="rect">
-            <a:avLst/>
-          </a:prstGeom>
-          <a:noFill/>
-        </p:spPr>
-        <p:txBody>
-          <a:bodyPr wrap="square">
-            <a:spAutoFit/>
-          </a:bodyPr>
-          <a:lstStyle/>
-          <a:p>
-            <a:pPr algn="l"/>
-            <a:r>
-              <a:rPr sz="1200" b="1" i="0">
-                <a:solidFill>
-                  <a:srgbClr val="FFFFFF"/>
-                </a:solidFill>
-              </a:rPr>
-              <a:t>Health Check</a:t>
-            </a:r>
-          </a:p>
-        </p:txBody>
-      </p:sp>
-      <p:sp>
-        <p:nvSpPr>
-          <p:cNvPr id="29" name="TextBox 28"/>
-          <p:cNvSpPr txBox="1"/>
-          <p:nvPr/>
-        </p:nvSpPr>
-        <p:spPr>
-          <a:xfrm>
-            <a:off x="8366760" y="4498848"/>
-            <a:ext cx="3429000" cy="1828800"/>
-          </a:xfrm>
-          <a:prstGeom prst="rect">
-            <a:avLst/>
-          </a:prstGeom>
-          <a:noFill/>
-        </p:spPr>
-        <p:txBody>
-          <a:bodyPr wrap="square">
-            <a:spAutoFit/>
-          </a:bodyPr>
-          <a:lstStyle/>
-          <a:p>
-            <a:pPr algn="l"/>
-            <a:r>
-              <a:rPr sz="1050" b="0" i="0">
-                <a:solidFill>
-                  <a:srgbClr val="555F6E"/>
-                </a:solidFill>
-              </a:rPr>
-              <a:t>• Late activities (Finish &lt; today and % &lt; 100)
-• %Daily vs reported % deviation
-• Items without owner and circular dependencies</a:t>
+              <a:t>The Task created by the team rolls up to the Story in the schedule; managers see
+progress and blockers without chasing status manually.</a:t>
             </a:r>
           </a:p>
         </p:txBody>
@@ -6226,7 +6002,7 @@
                   <a:srgbClr val="FFFFFF"/>
                 </a:solidFill>
               </a:rPr>
-              <a:t>Strategic benefits for Management</a:t>
+              <a:t>Key features</a:t>
             </a:r>
           </a:p>
         </p:txBody>
@@ -6239,8 +6015,8 @@
         </p:nvSpPr>
         <p:spPr>
           <a:xfrm>
-            <a:off x="365760" y="1417320"/>
-            <a:ext cx="5577840" cy="1600200"/>
+            <a:off x="320040" y="1417320"/>
+            <a:ext cx="2788920" cy="2377440"/>
           </a:xfrm>
           <a:prstGeom prst="rect">
             <a:avLst/>
@@ -6284,18 +6060,18 @@
         </p:nvSpPr>
         <p:spPr>
           <a:xfrm>
-            <a:off x="365760" y="1417320"/>
-            <a:ext cx="64008" cy="1600200"/>
+            <a:off x="320040" y="1417320"/>
+            <a:ext cx="2788920" cy="411480"/>
           </a:xfrm>
           <a:prstGeom prst="rect">
             <a:avLst/>
           </a:prstGeom>
           <a:solidFill>
-            <a:srgbClr val="E87B00"/>
+            <a:srgbClr val="2B579A"/>
           </a:solidFill>
           <a:ln>
             <a:solidFill>
-              <a:srgbClr val="E87B00"/>
+              <a:srgbClr val="2B579A"/>
             </a:solidFill>
           </a:ln>
         </p:spPr>
@@ -6329,8 +6105,8 @@
         </p:nvSpPr>
         <p:spPr>
           <a:xfrm>
-            <a:off x="566928" y="1527048"/>
-            <a:ext cx="5257800" cy="1417320"/>
+            <a:off x="457200" y="1463040"/>
+            <a:ext cx="2606040" cy="347472"/>
           </a:xfrm>
           <a:prstGeom prst="rect">
             <a:avLst/>
@@ -6343,42 +6119,65 @@
           </a:bodyPr>
           <a:lstStyle/>
           <a:p>
-            <a:r>
-              <a:rPr sz="1200" b="1">
-                <a:solidFill>
-                  <a:srgbClr val="1A3A6B"/>
+            <a:pPr algn="l"/>
+            <a:r>
+              <a:rPr sz="1200" b="1" i="0">
+                <a:solidFill>
+                  <a:srgbClr val="FFFFFF"/>
                 </a:solidFill>
               </a:rPr>
-              <a:t>🎯  Real visibility into IT projects</a:t>
-            </a:r>
-          </a:p>
-          <a:p>
-            <a:pPr algn="l">
-              <a:spcBef>
-                <a:spcPts val="500"/>
-              </a:spcBef>
-            </a:pPr>
+              <a:t>Azure DevOps import</a:t>
+            </a:r>
+          </a:p>
+        </p:txBody>
+      </p:sp>
+      <p:sp>
+        <p:nvSpPr>
+          <p:cNvPr id="9" name="TextBox 8"/>
+          <p:cNvSpPr txBox="1"/>
+          <p:nvPr/>
+        </p:nvSpPr>
+        <p:spPr>
+          <a:xfrm>
+            <a:off x="457200" y="1892808"/>
+            <a:ext cx="2560320" cy="1828800"/>
+          </a:xfrm>
+          <a:prstGeom prst="rect">
+            <a:avLst/>
+          </a:prstGeom>
+          <a:noFill/>
+        </p:spPr>
+        <p:txBody>
+          <a:bodyPr wrap="square">
+            <a:spAutoFit/>
+          </a:bodyPr>
+          <a:lstStyle/>
+          <a:p>
+            <a:pPr algn="l"/>
             <a:r>
               <a:rPr sz="1050" b="0" i="0">
                 <a:solidFill>
                   <a:srgbClr val="555F6E"/>
                 </a:solidFill>
               </a:rPr>
-              <a:t>A consolidated schedule with dates, dependencies and completion percentage — without relying on manual team reports.</a:t>
-            </a:r>
-          </a:p>
-        </p:txBody>
-      </p:sp>
-      <p:sp>
-        <p:nvSpPr>
-          <p:cNvPr id="9" name="Rectangle 8"/>
+              <a:t>• Project → Epic → Feature → Story hierarchy
+• Optional Task level (Load Task ToDo)
+• Estimates, dates, sprints and owners
+• Predecessors and blockers (Block tag)</a:t>
+            </a:r>
+          </a:p>
+        </p:txBody>
+      </p:sp>
+      <p:sp>
+        <p:nvSpPr>
+          <p:cNvPr id="10" name="Rectangle 9"/>
           <p:cNvSpPr/>
           <p:nvPr/>
         </p:nvSpPr>
         <p:spPr>
           <a:xfrm>
-            <a:off x="6217920" y="1417320"/>
-            <a:ext cx="5577840" cy="1600200"/>
+            <a:off x="3291840" y="1417320"/>
+            <a:ext cx="2788920" cy="2377440"/>
           </a:xfrm>
           <a:prstGeom prst="rect">
             <a:avLst/>
@@ -6416,24 +6215,24 @@
       </p:sp>
       <p:sp>
         <p:nvSpPr>
-          <p:cNvPr id="10" name="Rectangle 9"/>
+          <p:cNvPr id="11" name="Rectangle 10"/>
           <p:cNvSpPr/>
           <p:nvPr/>
         </p:nvSpPr>
         <p:spPr>
           <a:xfrm>
-            <a:off x="6217920" y="1417320"/>
-            <a:ext cx="64008" cy="1600200"/>
+            <a:off x="3291840" y="1417320"/>
+            <a:ext cx="2788920" cy="411480"/>
           </a:xfrm>
           <a:prstGeom prst="rect">
             <a:avLst/>
           </a:prstGeom>
           <a:solidFill>
-            <a:srgbClr val="E87B00"/>
+            <a:srgbClr val="2B579A"/>
           </a:solidFill>
           <a:ln>
             <a:solidFill>
-              <a:srgbClr val="E87B00"/>
+              <a:srgbClr val="2B579A"/>
             </a:solidFill>
           </a:ln>
         </p:spPr>
@@ -6461,14 +6260,14 @@
       </p:sp>
       <p:sp>
         <p:nvSpPr>
-          <p:cNvPr id="11" name="TextBox 10"/>
+          <p:cNvPr id="12" name="TextBox 11"/>
           <p:cNvSpPr txBox="1"/>
           <p:nvPr/>
         </p:nvSpPr>
         <p:spPr>
           <a:xfrm>
-            <a:off x="6419088" y="1527048"/>
-            <a:ext cx="5257800" cy="1417320"/>
+            <a:off x="3429000" y="1463040"/>
+            <a:ext cx="2606040" cy="347472"/>
           </a:xfrm>
           <a:prstGeom prst="rect">
             <a:avLst/>
@@ -6481,42 +6280,65 @@
           </a:bodyPr>
           <a:lstStyle/>
           <a:p>
-            <a:r>
-              <a:rPr sz="1200" b="1">
-                <a:solidFill>
-                  <a:srgbClr val="1A3A6B"/>
+            <a:pPr algn="l"/>
+            <a:r>
+              <a:rPr sz="1200" b="1" i="0">
+                <a:solidFill>
+                  <a:srgbClr val="FFFFFF"/>
                 </a:solidFill>
               </a:rPr>
-              <a:t>⚡  Zero impact on technical workflow</a:t>
-            </a:r>
-          </a:p>
-          <a:p>
-            <a:pPr algn="l">
-              <a:spcBef>
-                <a:spcPts val="500"/>
-              </a:spcBef>
-            </a:pPr>
+              <a:t>Smart schedule</a:t>
+            </a:r>
+          </a:p>
+        </p:txBody>
+      </p:sp>
+      <p:sp>
+        <p:nvSpPr>
+          <p:cNvPr id="13" name="TextBox 12"/>
+          <p:cNvSpPr txBox="1"/>
+          <p:nvPr/>
+        </p:nvSpPr>
+        <p:spPr>
+          <a:xfrm>
+            <a:off x="3429000" y="1892808"/>
+            <a:ext cx="2560320" cy="1828800"/>
+          </a:xfrm>
+          <a:prstGeom prst="rect">
+            <a:avLst/>
+          </a:prstGeom>
+          <a:noFill/>
+        </p:spPr>
+        <p:txBody>
+          <a:bodyPr wrap="square">
+            <a:spAutoFit/>
+          </a:bodyPr>
+          <a:lstStyle/>
+          <a:p>
+            <a:pPr algn="l"/>
             <a:r>
               <a:rPr sz="1050" b="0" i="0">
                 <a:solidFill>
                   <a:srgbClr val="555F6E"/>
                 </a:solidFill>
               </a:rPr>
-              <a:t>The team continues using Azure DevOps as before. NXProject is a reading and planning layer — no process change required.</a:t>
-            </a:r>
-          </a:p>
-        </p:txBody>
-      </p:sp>
-      <p:sp>
-        <p:nvSpPr>
-          <p:cNvPr id="12" name="Rectangle 11"/>
+              <a:t>• Automatic predecessor cascade
+• Virtual predecessor by resource
+• Calendar with holidays and working hours
+• %Daily column: expected pace by today</a:t>
+            </a:r>
+          </a:p>
+        </p:txBody>
+      </p:sp>
+      <p:sp>
+        <p:nvSpPr>
+          <p:cNvPr id="14" name="Rectangle 13"/>
           <p:cNvSpPr/>
           <p:nvPr/>
         </p:nvSpPr>
         <p:spPr>
           <a:xfrm>
-            <a:off x="365760" y="3154680"/>
-            <a:ext cx="5577840" cy="1600200"/>
+            <a:off x="6263640" y="1417320"/>
+            <a:ext cx="2788920" cy="2377440"/>
           </a:xfrm>
           <a:prstGeom prst="rect">
             <a:avLst/>
@@ -6554,24 +6376,24 @@
       </p:sp>
       <p:sp>
         <p:nvSpPr>
-          <p:cNvPr id="13" name="Rectangle 12"/>
+          <p:cNvPr id="15" name="Rectangle 14"/>
           <p:cNvSpPr/>
           <p:nvPr/>
         </p:nvSpPr>
         <p:spPr>
           <a:xfrm>
-            <a:off x="365760" y="3154680"/>
-            <a:ext cx="64008" cy="1600200"/>
+            <a:off x="6263640" y="1417320"/>
+            <a:ext cx="2788920" cy="411480"/>
           </a:xfrm>
           <a:prstGeom prst="rect">
             <a:avLst/>
           </a:prstGeom>
           <a:solidFill>
-            <a:srgbClr val="E87B00"/>
+            <a:srgbClr val="2B579A"/>
           </a:solidFill>
           <a:ln>
             <a:solidFill>
-              <a:srgbClr val="E87B00"/>
+              <a:srgbClr val="2B579A"/>
             </a:solidFill>
           </a:ln>
         </p:spPr>
@@ -6599,14 +6421,14 @@
       </p:sp>
       <p:sp>
         <p:nvSpPr>
-          <p:cNvPr id="14" name="TextBox 13"/>
+          <p:cNvPr id="16" name="TextBox 15"/>
           <p:cNvSpPr txBox="1"/>
           <p:nvPr/>
         </p:nvSpPr>
         <p:spPr>
           <a:xfrm>
-            <a:off x="566928" y="3264408"/>
-            <a:ext cx="5257800" cy="1417320"/>
+            <a:off x="6400800" y="1463040"/>
+            <a:ext cx="2606040" cy="347472"/>
           </a:xfrm>
           <a:prstGeom prst="rect">
             <a:avLst/>
@@ -6619,42 +6441,65 @@
           </a:bodyPr>
           <a:lstStyle/>
           <a:p>
-            <a:r>
-              <a:rPr sz="1200" b="1">
-                <a:solidFill>
-                  <a:srgbClr val="1A3A6B"/>
+            <a:pPr algn="l"/>
+            <a:r>
+              <a:rPr sz="1200" b="1" i="0">
+                <a:solidFill>
+                  <a:srgbClr val="FFFFFF"/>
                 </a:solidFill>
               </a:rPr>
-              <a:t>💰  Less rework and hidden cost</a:t>
-            </a:r>
-          </a:p>
-          <a:p>
-            <a:pPr algn="l">
-              <a:spcBef>
-                <a:spcPts val="500"/>
-              </a:spcBef>
-            </a:pPr>
+              <a:t>Gantt chart</a:t>
+            </a:r>
+          </a:p>
+        </p:txBody>
+      </p:sp>
+      <p:sp>
+        <p:nvSpPr>
+          <p:cNvPr id="17" name="TextBox 16"/>
+          <p:cNvSpPr txBox="1"/>
+          <p:nvPr/>
+        </p:nvSpPr>
+        <p:spPr>
+          <a:xfrm>
+            <a:off x="6400800" y="1892808"/>
+            <a:ext cx="2560320" cy="1828800"/>
+          </a:xfrm>
+          <a:prstGeom prst="rect">
+            <a:avLst/>
+          </a:prstGeom>
+          <a:noFill/>
+        </p:spPr>
+        <p:txBody>
+          <a:bodyPr wrap="square">
+            <a:spAutoFit/>
+          </a:bodyPr>
+          <a:lstStyle/>
+          <a:p>
+            <a:pPr algn="l"/>
             <a:r>
               <a:rPr sz="1050" b="0" i="0">
                 <a:solidFill>
                   <a:srgbClr val="555F6E"/>
                 </a:solidFill>
               </a:rPr>
-              <a:t>Eliminates parallel spreadsheets, long status meetings and the cost of delays detected too late.</a:t>
-            </a:r>
-          </a:p>
-        </p:txBody>
-      </p:sp>
-      <p:sp>
-        <p:nvSpPr>
-          <p:cNvPr id="15" name="Rectangle 14"/>
+              <a:t>• Bars, milestones and dependency arrows
+• Critical path (CPM) and baseline
+• Zoom: Day, Week, Sprint, Month, Quarter
+• Drag to visually replan</a:t>
+            </a:r>
+          </a:p>
+        </p:txBody>
+      </p:sp>
+      <p:sp>
+        <p:nvSpPr>
+          <p:cNvPr id="18" name="Rectangle 17"/>
           <p:cNvSpPr/>
           <p:nvPr/>
         </p:nvSpPr>
         <p:spPr>
           <a:xfrm>
-            <a:off x="6217920" y="3154680"/>
-            <a:ext cx="5577840" cy="1600200"/>
+            <a:off x="9235440" y="1417320"/>
+            <a:ext cx="2788920" cy="2377440"/>
           </a:xfrm>
           <a:prstGeom prst="rect">
             <a:avLst/>
@@ -6692,24 +6537,24 @@
       </p:sp>
       <p:sp>
         <p:nvSpPr>
-          <p:cNvPr id="16" name="Rectangle 15"/>
+          <p:cNvPr id="19" name="Rectangle 18"/>
           <p:cNvSpPr/>
           <p:nvPr/>
         </p:nvSpPr>
         <p:spPr>
           <a:xfrm>
-            <a:off x="6217920" y="3154680"/>
-            <a:ext cx="64008" cy="1600200"/>
+            <a:off x="9235440" y="1417320"/>
+            <a:ext cx="2788920" cy="411480"/>
           </a:xfrm>
           <a:prstGeom prst="rect">
             <a:avLst/>
           </a:prstGeom>
           <a:solidFill>
-            <a:srgbClr val="E87B00"/>
+            <a:srgbClr val="2B579A"/>
           </a:solidFill>
           <a:ln>
             <a:solidFill>
-              <a:srgbClr val="E87B00"/>
+              <a:srgbClr val="2B579A"/>
             </a:solidFill>
           </a:ln>
         </p:spPr>
@@ -6737,14 +6582,14 @@
       </p:sp>
       <p:sp>
         <p:nvSpPr>
-          <p:cNvPr id="17" name="TextBox 16"/>
+          <p:cNvPr id="20" name="TextBox 19"/>
           <p:cNvSpPr txBox="1"/>
           <p:nvPr/>
         </p:nvSpPr>
         <p:spPr>
           <a:xfrm>
-            <a:off x="6419088" y="3264408"/>
-            <a:ext cx="5257800" cy="1417320"/>
+            <a:off x="9372600" y="1463040"/>
+            <a:ext cx="2606040" cy="347472"/>
           </a:xfrm>
           <a:prstGeom prst="rect">
             <a:avLst/>
@@ -6757,42 +6602,65 @@
           </a:bodyPr>
           <a:lstStyle/>
           <a:p>
-            <a:r>
-              <a:rPr sz="1200" b="1">
-                <a:solidFill>
-                  <a:srgbClr val="1A3A6B"/>
+            <a:pPr algn="l"/>
+            <a:r>
+              <a:rPr sz="1200" b="1" i="0">
+                <a:solidFill>
+                  <a:srgbClr val="FFFFFF"/>
                 </a:solidFill>
               </a:rPr>
-              <a:t>📈  Data-driven decisions</a:t>
-            </a:r>
-          </a:p>
-          <a:p>
-            <a:pPr algn="l">
-              <a:spcBef>
-                <a:spcPts val="500"/>
-              </a:spcBef>
-            </a:pPr>
+              <a:t>TaskBoard</a:t>
+            </a:r>
+          </a:p>
+        </p:txBody>
+      </p:sp>
+      <p:sp>
+        <p:nvSpPr>
+          <p:cNvPr id="21" name="TextBox 20"/>
+          <p:cNvSpPr txBox="1"/>
+          <p:nvPr/>
+        </p:nvSpPr>
+        <p:spPr>
+          <a:xfrm>
+            <a:off x="9372600" y="1892808"/>
+            <a:ext cx="2560320" cy="1828800"/>
+          </a:xfrm>
+          <a:prstGeom prst="rect">
+            <a:avLst/>
+          </a:prstGeom>
+          <a:noFill/>
+        </p:spPr>
+        <p:txBody>
+          <a:bodyPr wrap="square">
+            <a:spAutoFit/>
+          </a:bodyPr>
+          <a:lstStyle/>
+          <a:p>
+            <a:pPr algn="l"/>
             <a:r>
               <a:rPr sz="1050" b="0" i="0">
                 <a:solidFill>
                   <a:srgbClr val="555F6E"/>
                 </a:solidFill>
               </a:rPr>
-              <a:t>Automatic Health Check, resource allocation and proactive delay alerts give management precise information for fast decisions.</a:t>
-            </a:r>
-          </a:p>
-        </p:txBody>
-      </p:sp>
-      <p:sp>
-        <p:nvSpPr>
-          <p:cNvPr id="18" name="Rectangle 17"/>
+              <a:t>• Project &amp; Story and Person &amp; Task views
+• Drag to change state; batched write-back
+• Doing/Done and WIP limit per person
+• Alert for Stories out of sync</a:t>
+            </a:r>
+          </a:p>
+        </p:txBody>
+      </p:sp>
+      <p:sp>
+        <p:nvSpPr>
+          <p:cNvPr id="22" name="Rectangle 21"/>
           <p:cNvSpPr/>
           <p:nvPr/>
         </p:nvSpPr>
         <p:spPr>
           <a:xfrm>
-            <a:off x="365760" y="4892040"/>
-            <a:ext cx="5577840" cy="1600200"/>
+            <a:off x="320040" y="4023360"/>
+            <a:ext cx="2788920" cy="2377440"/>
           </a:xfrm>
           <a:prstGeom prst="rect">
             <a:avLst/>
@@ -6830,24 +6698,24 @@
       </p:sp>
       <p:sp>
         <p:nvSpPr>
-          <p:cNvPr id="19" name="Rectangle 18"/>
+          <p:cNvPr id="23" name="Rectangle 22"/>
           <p:cNvSpPr/>
           <p:nvPr/>
         </p:nvSpPr>
         <p:spPr>
           <a:xfrm>
-            <a:off x="365760" y="4892040"/>
-            <a:ext cx="64008" cy="1600200"/>
+            <a:off x="320040" y="4023360"/>
+            <a:ext cx="2788920" cy="411480"/>
           </a:xfrm>
           <a:prstGeom prst="rect">
             <a:avLst/>
           </a:prstGeom>
           <a:solidFill>
-            <a:srgbClr val="E87B00"/>
+            <a:srgbClr val="2B579A"/>
           </a:solidFill>
           <a:ln>
             <a:solidFill>
-              <a:srgbClr val="E87B00"/>
+              <a:srgbClr val="2B579A"/>
             </a:solidFill>
           </a:ln>
         </p:spPr>
@@ -6875,14 +6743,14 @@
       </p:sp>
       <p:sp>
         <p:nvSpPr>
-          <p:cNvPr id="20" name="TextBox 19"/>
+          <p:cNvPr id="24" name="TextBox 23"/>
           <p:cNvSpPr txBox="1"/>
           <p:nvPr/>
         </p:nvSpPr>
         <p:spPr>
           <a:xfrm>
-            <a:off x="566928" y="5001768"/>
-            <a:ext cx="5257800" cy="1417320"/>
+            <a:off x="457200" y="4069080"/>
+            <a:ext cx="2606040" cy="347472"/>
           </a:xfrm>
           <a:prstGeom prst="rect">
             <a:avLst/>
@@ -6895,42 +6763,65 @@
           </a:bodyPr>
           <a:lstStyle/>
           <a:p>
-            <a:r>
-              <a:rPr sz="1200" b="1">
-                <a:solidFill>
-                  <a:srgbClr val="1A3A6B"/>
+            <a:pPr algn="l"/>
+            <a:r>
+              <a:rPr sz="1200" b="1" i="0">
+                <a:solidFill>
+                  <a:srgbClr val="FFFFFF"/>
                 </a:solidFill>
               </a:rPr>
-              <a:t>🔒  Security and control</a:t>
-            </a:r>
-          </a:p>
-          <a:p>
-            <a:pPr algn="l">
-              <a:spcBef>
-                <a:spcPts val="500"/>
-              </a:spcBef>
-            </a:pPr>
+              <a:t>Task Plan (Excel)</a:t>
+            </a:r>
+          </a:p>
+        </p:txBody>
+      </p:sp>
+      <p:sp>
+        <p:nvSpPr>
+          <p:cNvPr id="25" name="TextBox 24"/>
+          <p:cNvSpPr txBox="1"/>
+          <p:nvPr/>
+        </p:nvSpPr>
+        <p:spPr>
+          <a:xfrm>
+            <a:off x="457200" y="4498848"/>
+            <a:ext cx="2560320" cy="1828800"/>
+          </a:xfrm>
+          <a:prstGeom prst="rect">
+            <a:avLst/>
+          </a:prstGeom>
+          <a:noFill/>
+        </p:spPr>
+        <p:txBody>
+          <a:bodyPr wrap="square">
+            <a:spAutoFit/>
+          </a:bodyPr>
+          <a:lstStyle/>
+          <a:p>
+            <a:pPr algn="l"/>
             <a:r>
               <a:rPr sz="1050" b="0" i="0">
                 <a:solidFill>
                   <a:srgbClr val="555F6E"/>
                 </a:solidFill>
               </a:rPr>
-              <a:t>Azure DevOps credentials protected by DPAPI (Windows per-user encryption). Project data stays in a local file — no mandatory cloud.</a:t>
-            </a:r>
-          </a:p>
-        </p:txBody>
-      </p:sp>
-      <p:sp>
-        <p:nvSpPr>
-          <p:cNvPr id="21" name="Rectangle 20"/>
+              <a:t>• Breaks the Story down into Tasks
+• AI suggestions and Tech Lead review
+• Applies to the schedule and syncs back
+• Automatic backup on every save</a:t>
+            </a:r>
+          </a:p>
+        </p:txBody>
+      </p:sp>
+      <p:sp>
+        <p:nvSpPr>
+          <p:cNvPr id="26" name="Rectangle 25"/>
           <p:cNvSpPr/>
           <p:nvPr/>
         </p:nvSpPr>
         <p:spPr>
           <a:xfrm>
-            <a:off x="6217920" y="4892040"/>
-            <a:ext cx="5577840" cy="1600200"/>
+            <a:off x="3291840" y="4023360"/>
+            <a:ext cx="2788920" cy="2377440"/>
           </a:xfrm>
           <a:prstGeom prst="rect">
             <a:avLst/>
@@ -6968,24 +6859,24 @@
       </p:sp>
       <p:sp>
         <p:nvSpPr>
-          <p:cNvPr id="22" name="Rectangle 21"/>
+          <p:cNvPr id="27" name="Rectangle 26"/>
           <p:cNvSpPr/>
           <p:nvPr/>
         </p:nvSpPr>
         <p:spPr>
           <a:xfrm>
-            <a:off x="6217920" y="4892040"/>
-            <a:ext cx="64008" cy="1600200"/>
+            <a:off x="3291840" y="4023360"/>
+            <a:ext cx="2788920" cy="411480"/>
           </a:xfrm>
           <a:prstGeom prst="rect">
             <a:avLst/>
           </a:prstGeom>
           <a:solidFill>
-            <a:srgbClr val="E87B00"/>
+            <a:srgbClr val="2B579A"/>
           </a:solidFill>
           <a:ln>
             <a:solidFill>
-              <a:srgbClr val="E87B00"/>
+              <a:srgbClr val="2B579A"/>
             </a:solidFill>
           </a:ln>
         </p:spPr>
@@ -7013,14 +6904,14 @@
       </p:sp>
       <p:sp>
         <p:nvSpPr>
-          <p:cNvPr id="23" name="TextBox 22"/>
+          <p:cNvPr id="28" name="TextBox 27"/>
           <p:cNvSpPr txBox="1"/>
           <p:nvPr/>
         </p:nvSpPr>
         <p:spPr>
           <a:xfrm>
-            <a:off x="6419088" y="5001768"/>
-            <a:ext cx="5257800" cy="1417320"/>
+            <a:off x="3429000" y="4069080"/>
+            <a:ext cx="2606040" cy="347472"/>
           </a:xfrm>
           <a:prstGeom prst="rect">
             <a:avLst/>
@@ -7033,28 +6924,372 @@
           </a:bodyPr>
           <a:lstStyle/>
           <a:p>
-            <a:r>
-              <a:rPr sz="1200" b="1">
-                <a:solidFill>
-                  <a:srgbClr val="1A3A6B"/>
+            <a:pPr algn="l"/>
+            <a:r>
+              <a:rPr sz="1200" b="1" i="0">
+                <a:solidFill>
+                  <a:srgbClr val="FFFFFF"/>
                 </a:solidFill>
               </a:rPr>
-              <a:t>📦  Simple deployment</a:t>
-            </a:r>
-          </a:p>
-          <a:p>
-            <a:pPr algn="l">
-              <a:spcBef>
-                <a:spcPts val="500"/>
-              </a:spcBef>
-            </a:pPr>
+              <a:t>Resources and costs</a:t>
+            </a:r>
+          </a:p>
+        </p:txBody>
+      </p:sp>
+      <p:sp>
+        <p:nvSpPr>
+          <p:cNvPr id="29" name="TextBox 28"/>
+          <p:cNvSpPr txBox="1"/>
+          <p:nvPr/>
+        </p:nvSpPr>
+        <p:spPr>
+          <a:xfrm>
+            <a:off x="3429000" y="4498848"/>
+            <a:ext cx="2560320" cy="1828800"/>
+          </a:xfrm>
+          <a:prstGeom prst="rect">
+            <a:avLst/>
+          </a:prstGeom>
+          <a:noFill/>
+        </p:spPr>
+        <p:txBody>
+          <a:bodyPr wrap="square">
+            <a:spAutoFit/>
+          </a:bodyPr>
+          <a:lstStyle/>
+          <a:p>
+            <a:pPr algn="l"/>
             <a:r>
               <a:rPr sz="1050" b="0" i="0">
                 <a:solidFill>
                   <a:srgbClr val="555F6E"/>
                 </a:solidFill>
               </a:rPr>
-              <a:t>Standalone installation (zero external dependencies), ready in minutes. No additional server infrastructure.</a:t>
+              <a:t>• Allocation by person and sprint
+• Allocation map by project and month
+• Cost per resource (hourly or monthly)
+• Overload alert (&gt;100%)</a:t>
+            </a:r>
+          </a:p>
+        </p:txBody>
+      </p:sp>
+      <p:sp>
+        <p:nvSpPr>
+          <p:cNvPr id="30" name="Rectangle 29"/>
+          <p:cNvSpPr/>
+          <p:nvPr/>
+        </p:nvSpPr>
+        <p:spPr>
+          <a:xfrm>
+            <a:off x="6263640" y="4023360"/>
+            <a:ext cx="2788920" cy="2377440"/>
+          </a:xfrm>
+          <a:prstGeom prst="rect">
+            <a:avLst/>
+          </a:prstGeom>
+          <a:solidFill>
+            <a:srgbClr val="FFFFFF"/>
+          </a:solidFill>
+          <a:ln>
+            <a:solidFill>
+              <a:srgbClr val="FFFFFF"/>
+            </a:solidFill>
+          </a:ln>
+        </p:spPr>
+        <p:style>
+          <a:lnRef idx="1">
+            <a:schemeClr val="accent1"/>
+          </a:lnRef>
+          <a:fillRef idx="3">
+            <a:schemeClr val="accent1"/>
+          </a:fillRef>
+          <a:effectRef idx="2">
+            <a:schemeClr val="accent1"/>
+          </a:effectRef>
+          <a:fontRef idx="minor">
+            <a:schemeClr val="lt1"/>
+          </a:fontRef>
+        </p:style>
+        <p:txBody>
+          <a:bodyPr rtlCol="0" anchor="ctr"/>
+          <a:lstStyle/>
+          <a:p>
+            <a:pPr algn="ctr"/>
+          </a:p>
+        </p:txBody>
+      </p:sp>
+      <p:sp>
+        <p:nvSpPr>
+          <p:cNvPr id="31" name="Rectangle 30"/>
+          <p:cNvSpPr/>
+          <p:nvPr/>
+        </p:nvSpPr>
+        <p:spPr>
+          <a:xfrm>
+            <a:off x="6263640" y="4023360"/>
+            <a:ext cx="2788920" cy="411480"/>
+          </a:xfrm>
+          <a:prstGeom prst="rect">
+            <a:avLst/>
+          </a:prstGeom>
+          <a:solidFill>
+            <a:srgbClr val="2B579A"/>
+          </a:solidFill>
+          <a:ln>
+            <a:solidFill>
+              <a:srgbClr val="2B579A"/>
+            </a:solidFill>
+          </a:ln>
+        </p:spPr>
+        <p:style>
+          <a:lnRef idx="1">
+            <a:schemeClr val="accent1"/>
+          </a:lnRef>
+          <a:fillRef idx="3">
+            <a:schemeClr val="accent1"/>
+          </a:fillRef>
+          <a:effectRef idx="2">
+            <a:schemeClr val="accent1"/>
+          </a:effectRef>
+          <a:fontRef idx="minor">
+            <a:schemeClr val="lt1"/>
+          </a:fontRef>
+        </p:style>
+        <p:txBody>
+          <a:bodyPr rtlCol="0" anchor="ctr"/>
+          <a:lstStyle/>
+          <a:p>
+            <a:pPr algn="ctr"/>
+          </a:p>
+        </p:txBody>
+      </p:sp>
+      <p:sp>
+        <p:nvSpPr>
+          <p:cNvPr id="32" name="TextBox 31"/>
+          <p:cNvSpPr txBox="1"/>
+          <p:nvPr/>
+        </p:nvSpPr>
+        <p:spPr>
+          <a:xfrm>
+            <a:off x="6400800" y="4069080"/>
+            <a:ext cx="2606040" cy="347472"/>
+          </a:xfrm>
+          <a:prstGeom prst="rect">
+            <a:avLst/>
+          </a:prstGeom>
+          <a:noFill/>
+        </p:spPr>
+        <p:txBody>
+          <a:bodyPr wrap="square">
+            <a:spAutoFit/>
+          </a:bodyPr>
+          <a:lstStyle/>
+          <a:p>
+            <a:pPr algn="l"/>
+            <a:r>
+              <a:rPr sz="1200" b="1" i="0">
+                <a:solidFill>
+                  <a:srgbClr val="FFFFFF"/>
+                </a:solidFill>
+              </a:rPr>
+              <a:t>Bidirectional sync</a:t>
+            </a:r>
+          </a:p>
+        </p:txBody>
+      </p:sp>
+      <p:sp>
+        <p:nvSpPr>
+          <p:cNvPr id="33" name="TextBox 32"/>
+          <p:cNvSpPr txBox="1"/>
+          <p:nvPr/>
+        </p:nvSpPr>
+        <p:spPr>
+          <a:xfrm>
+            <a:off x="6400800" y="4498848"/>
+            <a:ext cx="2560320" cy="1828800"/>
+          </a:xfrm>
+          <a:prstGeom prst="rect">
+            <a:avLst/>
+          </a:prstGeom>
+          <a:noFill/>
+        </p:spPr>
+        <p:txBody>
+          <a:bodyPr wrap="square">
+            <a:spAutoFit/>
+          </a:bodyPr>
+          <a:lstStyle/>
+          <a:p>
+            <a:pPr algn="l"/>
+            <a:r>
+              <a:rPr sz="1050" b="0" i="0">
+                <a:solidFill>
+                  <a:srgbClr val="555F6E"/>
+                </a:solidFill>
+              </a:rPr>
+              <a:t>• Dates, hours, state, sprint, tags and predecessors
+• Creates new work items in DevOps
+• Concurrency control across users
+• Project admin group (Adm_NX)</a:t>
+            </a:r>
+          </a:p>
+        </p:txBody>
+      </p:sp>
+      <p:sp>
+        <p:nvSpPr>
+          <p:cNvPr id="34" name="Rectangle 33"/>
+          <p:cNvSpPr/>
+          <p:nvPr/>
+        </p:nvSpPr>
+        <p:spPr>
+          <a:xfrm>
+            <a:off x="9235440" y="4023360"/>
+            <a:ext cx="2788920" cy="2377440"/>
+          </a:xfrm>
+          <a:prstGeom prst="rect">
+            <a:avLst/>
+          </a:prstGeom>
+          <a:solidFill>
+            <a:srgbClr val="FFFFFF"/>
+          </a:solidFill>
+          <a:ln>
+            <a:solidFill>
+              <a:srgbClr val="FFFFFF"/>
+            </a:solidFill>
+          </a:ln>
+        </p:spPr>
+        <p:style>
+          <a:lnRef idx="1">
+            <a:schemeClr val="accent1"/>
+          </a:lnRef>
+          <a:fillRef idx="3">
+            <a:schemeClr val="accent1"/>
+          </a:fillRef>
+          <a:effectRef idx="2">
+            <a:schemeClr val="accent1"/>
+          </a:effectRef>
+          <a:fontRef idx="minor">
+            <a:schemeClr val="lt1"/>
+          </a:fontRef>
+        </p:style>
+        <p:txBody>
+          <a:bodyPr rtlCol="0" anchor="ctr"/>
+          <a:lstStyle/>
+          <a:p>
+            <a:pPr algn="ctr"/>
+          </a:p>
+        </p:txBody>
+      </p:sp>
+      <p:sp>
+        <p:nvSpPr>
+          <p:cNvPr id="35" name="Rectangle 34"/>
+          <p:cNvSpPr/>
+          <p:nvPr/>
+        </p:nvSpPr>
+        <p:spPr>
+          <a:xfrm>
+            <a:off x="9235440" y="4023360"/>
+            <a:ext cx="2788920" cy="411480"/>
+          </a:xfrm>
+          <a:prstGeom prst="rect">
+            <a:avLst/>
+          </a:prstGeom>
+          <a:solidFill>
+            <a:srgbClr val="2B579A"/>
+          </a:solidFill>
+          <a:ln>
+            <a:solidFill>
+              <a:srgbClr val="2B579A"/>
+            </a:solidFill>
+          </a:ln>
+        </p:spPr>
+        <p:style>
+          <a:lnRef idx="1">
+            <a:schemeClr val="accent1"/>
+          </a:lnRef>
+          <a:fillRef idx="3">
+            <a:schemeClr val="accent1"/>
+          </a:fillRef>
+          <a:effectRef idx="2">
+            <a:schemeClr val="accent1"/>
+          </a:effectRef>
+          <a:fontRef idx="minor">
+            <a:schemeClr val="lt1"/>
+          </a:fontRef>
+        </p:style>
+        <p:txBody>
+          <a:bodyPr rtlCol="0" anchor="ctr"/>
+          <a:lstStyle/>
+          <a:p>
+            <a:pPr algn="ctr"/>
+          </a:p>
+        </p:txBody>
+      </p:sp>
+      <p:sp>
+        <p:nvSpPr>
+          <p:cNvPr id="36" name="TextBox 35"/>
+          <p:cNvSpPr txBox="1"/>
+          <p:nvPr/>
+        </p:nvSpPr>
+        <p:spPr>
+          <a:xfrm>
+            <a:off x="9372600" y="4069080"/>
+            <a:ext cx="2606040" cy="347472"/>
+          </a:xfrm>
+          <a:prstGeom prst="rect">
+            <a:avLst/>
+          </a:prstGeom>
+          <a:noFill/>
+        </p:spPr>
+        <p:txBody>
+          <a:bodyPr wrap="square">
+            <a:spAutoFit/>
+          </a:bodyPr>
+          <a:lstStyle/>
+          <a:p>
+            <a:pPr algn="l"/>
+            <a:r>
+              <a:rPr sz="1200" b="1" i="0">
+                <a:solidFill>
+                  <a:srgbClr val="FFFFFF"/>
+                </a:solidFill>
+              </a:rPr>
+              <a:t>Health Check</a:t>
+            </a:r>
+          </a:p>
+        </p:txBody>
+      </p:sp>
+      <p:sp>
+        <p:nvSpPr>
+          <p:cNvPr id="37" name="TextBox 36"/>
+          <p:cNvSpPr txBox="1"/>
+          <p:nvPr/>
+        </p:nvSpPr>
+        <p:spPr>
+          <a:xfrm>
+            <a:off x="9372600" y="4498848"/>
+            <a:ext cx="2560320" cy="1828800"/>
+          </a:xfrm>
+          <a:prstGeom prst="rect">
+            <a:avLst/>
+          </a:prstGeom>
+          <a:noFill/>
+        </p:spPr>
+        <p:txBody>
+          <a:bodyPr wrap="square">
+            <a:spAutoFit/>
+          </a:bodyPr>
+          <a:lstStyle/>
+          <a:p>
+            <a:pPr algn="l"/>
+            <a:r>
+              <a:rPr sz="1050" b="0" i="0">
+                <a:solidFill>
+                  <a:srgbClr val="555F6E"/>
+                </a:solidFill>
+              </a:rPr>
+              <a:t>• Late activities (Finish &lt; today and % &lt; 100)
+• %Daily vs reported % deviation
+• Items without owner and circular dependencies</a:t>
             </a:r>
           </a:p>
         </p:txBody>
@@ -7241,7 +7476,7 @@
                   <a:srgbClr val="FFFFFF"/>
                 </a:solidFill>
               </a:rPr>
-              <a:t>How it works — workflow</a:t>
+              <a:t>Strategic benefits for Management</a:t>
             </a:r>
           </a:p>
         </p:txBody>
@@ -7254,18 +7489,18 @@
         </p:nvSpPr>
         <p:spPr>
           <a:xfrm>
-            <a:off x="333756" y="2011680"/>
-            <a:ext cx="2011680" cy="3474720"/>
+            <a:off x="365760" y="1417320"/>
+            <a:ext cx="5577840" cy="1600200"/>
           </a:xfrm>
           <a:prstGeom prst="rect">
             <a:avLst/>
           </a:prstGeom>
           <a:solidFill>
-            <a:srgbClr val="2B579A"/>
+            <a:srgbClr val="FFFFFF"/>
           </a:solidFill>
           <a:ln>
             <a:solidFill>
-              <a:srgbClr val="2B579A"/>
+              <a:srgbClr val="FFFFFF"/>
             </a:solidFill>
           </a:ln>
         </p:spPr>
@@ -7299,8 +7534,8 @@
         </p:nvSpPr>
         <p:spPr>
           <a:xfrm>
-            <a:off x="1019556" y="2176272"/>
-            <a:ext cx="640080" cy="640080"/>
+            <a:off x="365760" y="1417320"/>
+            <a:ext cx="64008" cy="1600200"/>
           </a:xfrm>
           <a:prstGeom prst="rect">
             <a:avLst/>
@@ -7344,8 +7579,8 @@
         </p:nvSpPr>
         <p:spPr>
           <a:xfrm>
-            <a:off x="1019556" y="2176272"/>
-            <a:ext cx="640080" cy="640080"/>
+            <a:off x="566928" y="1527048"/>
+            <a:ext cx="5257800" cy="1417320"/>
           </a:xfrm>
           <a:prstGeom prst="rect">
             <a:avLst/>
@@ -7358,142 +7593,52 @@
           </a:bodyPr>
           <a:lstStyle/>
           <a:p>
-            <a:pPr algn="ctr"/>
-            <a:r>
-              <a:rPr sz="2000" b="1" i="0">
-                <a:solidFill>
-                  <a:srgbClr val="FFFFFF"/>
+            <a:r>
+              <a:rPr sz="1200" b="1">
+                <a:solidFill>
+                  <a:srgbClr val="1A3A6B"/>
                 </a:solidFill>
               </a:rPr>
-              <a:t>1</a:t>
-            </a:r>
-          </a:p>
-        </p:txBody>
-      </p:sp>
-      <p:sp>
-        <p:nvSpPr>
-          <p:cNvPr id="9" name="TextBox 8"/>
-          <p:cNvSpPr txBox="1"/>
-          <p:nvPr/>
-        </p:nvSpPr>
-        <p:spPr>
-          <a:xfrm>
-            <a:off x="425196" y="3017520"/>
-            <a:ext cx="1828800" cy="548640"/>
-          </a:xfrm>
-          <a:prstGeom prst="rect">
-            <a:avLst/>
-          </a:prstGeom>
-          <a:noFill/>
-        </p:spPr>
-        <p:txBody>
-          <a:bodyPr wrap="square">
-            <a:spAutoFit/>
-          </a:bodyPr>
-          <a:lstStyle/>
-          <a:p>
-            <a:pPr algn="ctr"/>
-            <a:r>
-              <a:rPr sz="1400" b="1" i="0">
-                <a:solidFill>
-                  <a:srgbClr val="FFFFFF"/>
+              <a:t>🎯  Real visibility into IT projects</a:t>
+            </a:r>
+          </a:p>
+          <a:p>
+            <a:pPr algn="l">
+              <a:spcBef>
+                <a:spcPts val="500"/>
+              </a:spcBef>
+            </a:pPr>
+            <a:r>
+              <a:rPr sz="1050" b="0" i="0">
+                <a:solidFill>
+                  <a:srgbClr val="555F6E"/>
                 </a:solidFill>
               </a:rPr>
-              <a:t>Import</a:t>
-            </a:r>
-          </a:p>
-        </p:txBody>
-      </p:sp>
-      <p:sp>
-        <p:nvSpPr>
-          <p:cNvPr id="10" name="TextBox 9"/>
-          <p:cNvSpPr txBox="1"/>
-          <p:nvPr/>
-        </p:nvSpPr>
-        <p:spPr>
-          <a:xfrm>
-            <a:off x="425196" y="3703320"/>
-            <a:ext cx="1828800" cy="1645920"/>
-          </a:xfrm>
-          <a:prstGeom prst="rect">
-            <a:avLst/>
-          </a:prstGeom>
-          <a:noFill/>
-        </p:spPr>
-        <p:txBody>
-          <a:bodyPr wrap="square">
-            <a:spAutoFit/>
-          </a:bodyPr>
-          <a:lstStyle/>
-          <a:p>
-            <a:pPr algn="ctr"/>
-            <a:r>
-              <a:rPr sz="1100" b="0" i="0">
-                <a:solidFill>
-                  <a:srgbClr val="D6E4F7"/>
-                </a:solidFill>
-              </a:rPr>
-              <a:t>Connect to Azure DevOps
-and import the work item
-hierarchy</a:t>
-            </a:r>
-          </a:p>
-        </p:txBody>
-      </p:sp>
-      <p:sp>
-        <p:nvSpPr>
-          <p:cNvPr id="11" name="TextBox 10"/>
-          <p:cNvSpPr txBox="1"/>
-          <p:nvPr/>
-        </p:nvSpPr>
-        <p:spPr>
-          <a:xfrm>
-            <a:off x="2436876" y="3611880"/>
-            <a:ext cx="274320" cy="274320"/>
-          </a:xfrm>
-          <a:prstGeom prst="rect">
-            <a:avLst/>
-          </a:prstGeom>
-          <a:noFill/>
-        </p:spPr>
-        <p:txBody>
-          <a:bodyPr wrap="square">
-            <a:spAutoFit/>
-          </a:bodyPr>
-          <a:lstStyle/>
-          <a:p>
-            <a:pPr algn="ctr"/>
-            <a:r>
-              <a:rPr sz="2200" b="1" i="0">
-                <a:solidFill>
-                  <a:srgbClr val="1A3A6B"/>
-                </a:solidFill>
-              </a:rPr>
-              <a:t>→</a:t>
-            </a:r>
-          </a:p>
-        </p:txBody>
-      </p:sp>
-      <p:sp>
-        <p:nvSpPr>
-          <p:cNvPr id="12" name="Rectangle 11"/>
+              <a:t>A consolidated schedule with dates, dependencies and completion percentage — without relying on manual team reports.</a:t>
+            </a:r>
+          </a:p>
+        </p:txBody>
+      </p:sp>
+      <p:sp>
+        <p:nvSpPr>
+          <p:cNvPr id="9" name="Rectangle 8"/>
           <p:cNvSpPr/>
           <p:nvPr/>
         </p:nvSpPr>
         <p:spPr>
           <a:xfrm>
-            <a:off x="2711196" y="2011680"/>
-            <a:ext cx="2011680" cy="3474720"/>
+            <a:off x="6217920" y="1417320"/>
+            <a:ext cx="5577840" cy="1600200"/>
           </a:xfrm>
           <a:prstGeom prst="rect">
             <a:avLst/>
           </a:prstGeom>
           <a:solidFill>
-            <a:srgbClr val="2B579A"/>
+            <a:srgbClr val="FFFFFF"/>
           </a:solidFill>
           <a:ln>
             <a:solidFill>
-              <a:srgbClr val="2B579A"/>
+              <a:srgbClr val="FFFFFF"/>
             </a:solidFill>
           </a:ln>
         </p:spPr>
@@ -7521,14 +7666,14 @@
       </p:sp>
       <p:sp>
         <p:nvSpPr>
-          <p:cNvPr id="13" name="Rectangle 12"/>
+          <p:cNvPr id="10" name="Rectangle 9"/>
           <p:cNvSpPr/>
           <p:nvPr/>
         </p:nvSpPr>
         <p:spPr>
           <a:xfrm>
-            <a:off x="3396996" y="2176272"/>
-            <a:ext cx="640080" cy="640080"/>
+            <a:off x="6217920" y="1417320"/>
+            <a:ext cx="64008" cy="1600200"/>
           </a:xfrm>
           <a:prstGeom prst="rect">
             <a:avLst/>
@@ -7566,14 +7711,14 @@
       </p:sp>
       <p:sp>
         <p:nvSpPr>
-          <p:cNvPr id="14" name="TextBox 13"/>
+          <p:cNvPr id="11" name="TextBox 10"/>
           <p:cNvSpPr txBox="1"/>
           <p:nvPr/>
         </p:nvSpPr>
         <p:spPr>
           <a:xfrm>
-            <a:off x="3396996" y="2176272"/>
-            <a:ext cx="640080" cy="640080"/>
+            <a:off x="6419088" y="1527048"/>
+            <a:ext cx="5257800" cy="1417320"/>
           </a:xfrm>
           <a:prstGeom prst="rect">
             <a:avLst/>
@@ -7586,142 +7731,52 @@
           </a:bodyPr>
           <a:lstStyle/>
           <a:p>
-            <a:pPr algn="ctr"/>
-            <a:r>
-              <a:rPr sz="2000" b="1" i="0">
-                <a:solidFill>
-                  <a:srgbClr val="FFFFFF"/>
+            <a:r>
+              <a:rPr sz="1200" b="1">
+                <a:solidFill>
+                  <a:srgbClr val="1A3A6B"/>
                 </a:solidFill>
               </a:rPr>
-              <a:t>2</a:t>
-            </a:r>
-          </a:p>
-        </p:txBody>
-      </p:sp>
-      <p:sp>
-        <p:nvSpPr>
-          <p:cNvPr id="15" name="TextBox 14"/>
-          <p:cNvSpPr txBox="1"/>
-          <p:nvPr/>
-        </p:nvSpPr>
-        <p:spPr>
-          <a:xfrm>
-            <a:off x="2802636" y="3017520"/>
-            <a:ext cx="1828800" cy="548640"/>
-          </a:xfrm>
-          <a:prstGeom prst="rect">
-            <a:avLst/>
-          </a:prstGeom>
-          <a:noFill/>
-        </p:spPr>
-        <p:txBody>
-          <a:bodyPr wrap="square">
-            <a:spAutoFit/>
-          </a:bodyPr>
-          <a:lstStyle/>
-          <a:p>
-            <a:pPr algn="ctr"/>
-            <a:r>
-              <a:rPr sz="1400" b="1" i="0">
-                <a:solidFill>
-                  <a:srgbClr val="FFFFFF"/>
+              <a:t>⚡  Zero impact on technical workflow</a:t>
+            </a:r>
+          </a:p>
+          <a:p>
+            <a:pPr algn="l">
+              <a:spcBef>
+                <a:spcPts val="500"/>
+              </a:spcBef>
+            </a:pPr>
+            <a:r>
+              <a:rPr sz="1050" b="0" i="0">
+                <a:solidFill>
+                  <a:srgbClr val="555F6E"/>
                 </a:solidFill>
               </a:rPr>
-              <a:t>Plan</a:t>
-            </a:r>
-          </a:p>
-        </p:txBody>
-      </p:sp>
-      <p:sp>
-        <p:nvSpPr>
-          <p:cNvPr id="16" name="TextBox 15"/>
-          <p:cNvSpPr txBox="1"/>
-          <p:nvPr/>
-        </p:nvSpPr>
-        <p:spPr>
-          <a:xfrm>
-            <a:off x="2802636" y="3703320"/>
-            <a:ext cx="1828800" cy="1645920"/>
-          </a:xfrm>
-          <a:prstGeom prst="rect">
-            <a:avLst/>
-          </a:prstGeom>
-          <a:noFill/>
-        </p:spPr>
-        <p:txBody>
-          <a:bodyPr wrap="square">
-            <a:spAutoFit/>
-          </a:bodyPr>
-          <a:lstStyle/>
-          <a:p>
-            <a:pPr algn="ctr"/>
-            <a:r>
-              <a:rPr sz="1100" b="0" i="0">
-                <a:solidFill>
-                  <a:srgbClr val="D6E4F7"/>
-                </a:solidFill>
-              </a:rPr>
-              <a:t>Adjust dates, duration,
-resources and dependencies
-in the schedule</a:t>
-            </a:r>
-          </a:p>
-        </p:txBody>
-      </p:sp>
-      <p:sp>
-        <p:nvSpPr>
-          <p:cNvPr id="17" name="TextBox 16"/>
-          <p:cNvSpPr txBox="1"/>
-          <p:nvPr/>
-        </p:nvSpPr>
-        <p:spPr>
-          <a:xfrm>
-            <a:off x="4814316" y="3611880"/>
-            <a:ext cx="274320" cy="274320"/>
-          </a:xfrm>
-          <a:prstGeom prst="rect">
-            <a:avLst/>
-          </a:prstGeom>
-          <a:noFill/>
-        </p:spPr>
-        <p:txBody>
-          <a:bodyPr wrap="square">
-            <a:spAutoFit/>
-          </a:bodyPr>
-          <a:lstStyle/>
-          <a:p>
-            <a:pPr algn="ctr"/>
-            <a:r>
-              <a:rPr sz="2200" b="1" i="0">
-                <a:solidFill>
-                  <a:srgbClr val="1A3A6B"/>
-                </a:solidFill>
-              </a:rPr>
-              <a:t>→</a:t>
-            </a:r>
-          </a:p>
-        </p:txBody>
-      </p:sp>
-      <p:sp>
-        <p:nvSpPr>
-          <p:cNvPr id="18" name="Rectangle 17"/>
+              <a:t>The team continues using Azure DevOps as before. NXProject is a reading and planning layer — no process change required.</a:t>
+            </a:r>
+          </a:p>
+        </p:txBody>
+      </p:sp>
+      <p:sp>
+        <p:nvSpPr>
+          <p:cNvPr id="12" name="Rectangle 11"/>
           <p:cNvSpPr/>
           <p:nvPr/>
         </p:nvSpPr>
         <p:spPr>
           <a:xfrm>
-            <a:off x="5088636" y="2011680"/>
-            <a:ext cx="2011680" cy="3474720"/>
+            <a:off x="365760" y="3154680"/>
+            <a:ext cx="5577840" cy="1600200"/>
           </a:xfrm>
           <a:prstGeom prst="rect">
             <a:avLst/>
           </a:prstGeom>
           <a:solidFill>
-            <a:srgbClr val="2B579A"/>
+            <a:srgbClr val="FFFFFF"/>
           </a:solidFill>
           <a:ln>
             <a:solidFill>
-              <a:srgbClr val="2B579A"/>
+              <a:srgbClr val="FFFFFF"/>
             </a:solidFill>
           </a:ln>
         </p:spPr>
@@ -7749,14 +7804,14 @@
       </p:sp>
       <p:sp>
         <p:nvSpPr>
-          <p:cNvPr id="19" name="Rectangle 18"/>
+          <p:cNvPr id="13" name="Rectangle 12"/>
           <p:cNvSpPr/>
           <p:nvPr/>
         </p:nvSpPr>
         <p:spPr>
           <a:xfrm>
-            <a:off x="5774436" y="2176272"/>
-            <a:ext cx="640080" cy="640080"/>
+            <a:off x="365760" y="3154680"/>
+            <a:ext cx="64008" cy="1600200"/>
           </a:xfrm>
           <a:prstGeom prst="rect">
             <a:avLst/>
@@ -7794,14 +7849,14 @@
       </p:sp>
       <p:sp>
         <p:nvSpPr>
-          <p:cNvPr id="20" name="TextBox 19"/>
+          <p:cNvPr id="14" name="TextBox 13"/>
           <p:cNvSpPr txBox="1"/>
           <p:nvPr/>
         </p:nvSpPr>
         <p:spPr>
           <a:xfrm>
-            <a:off x="5774436" y="2176272"/>
-            <a:ext cx="640080" cy="640080"/>
+            <a:off x="566928" y="3264408"/>
+            <a:ext cx="5257800" cy="1417320"/>
           </a:xfrm>
           <a:prstGeom prst="rect">
             <a:avLst/>
@@ -7814,142 +7869,52 @@
           </a:bodyPr>
           <a:lstStyle/>
           <a:p>
-            <a:pPr algn="ctr"/>
-            <a:r>
-              <a:rPr sz="2000" b="1" i="0">
-                <a:solidFill>
-                  <a:srgbClr val="FFFFFF"/>
+            <a:r>
+              <a:rPr sz="1200" b="1">
+                <a:solidFill>
+                  <a:srgbClr val="1A3A6B"/>
                 </a:solidFill>
               </a:rPr>
-              <a:t>3</a:t>
-            </a:r>
-          </a:p>
-        </p:txBody>
-      </p:sp>
-      <p:sp>
-        <p:nvSpPr>
-          <p:cNvPr id="21" name="TextBox 20"/>
-          <p:cNvSpPr txBox="1"/>
-          <p:nvPr/>
-        </p:nvSpPr>
-        <p:spPr>
-          <a:xfrm>
-            <a:off x="5180076" y="3017520"/>
-            <a:ext cx="1828800" cy="548640"/>
-          </a:xfrm>
-          <a:prstGeom prst="rect">
-            <a:avLst/>
-          </a:prstGeom>
-          <a:noFill/>
-        </p:spPr>
-        <p:txBody>
-          <a:bodyPr wrap="square">
-            <a:spAutoFit/>
-          </a:bodyPr>
-          <a:lstStyle/>
-          <a:p>
-            <a:pPr algn="ctr"/>
-            <a:r>
-              <a:rPr sz="1400" b="1" i="0">
-                <a:solidFill>
-                  <a:srgbClr val="FFFFFF"/>
+              <a:t>💰  Less rework and hidden cost</a:t>
+            </a:r>
+          </a:p>
+          <a:p>
+            <a:pPr algn="l">
+              <a:spcBef>
+                <a:spcPts val="500"/>
+              </a:spcBef>
+            </a:pPr>
+            <a:r>
+              <a:rPr sz="1050" b="0" i="0">
+                <a:solidFill>
+                  <a:srgbClr val="555F6E"/>
                 </a:solidFill>
               </a:rPr>
-              <a:t>Visualize</a:t>
-            </a:r>
-          </a:p>
-        </p:txBody>
-      </p:sp>
-      <p:sp>
-        <p:nvSpPr>
-          <p:cNvPr id="22" name="TextBox 21"/>
-          <p:cNvSpPr txBox="1"/>
-          <p:nvPr/>
-        </p:nvSpPr>
-        <p:spPr>
-          <a:xfrm>
-            <a:off x="5180076" y="3703320"/>
-            <a:ext cx="1828800" cy="1645920"/>
-          </a:xfrm>
-          <a:prstGeom prst="rect">
-            <a:avLst/>
-          </a:prstGeom>
-          <a:noFill/>
-        </p:spPr>
-        <p:txBody>
-          <a:bodyPr wrap="square">
-            <a:spAutoFit/>
-          </a:bodyPr>
-          <a:lstStyle/>
-          <a:p>
-            <a:pPr algn="ctr"/>
-            <a:r>
-              <a:rPr sz="1100" b="0" i="0">
-                <a:solidFill>
-                  <a:srgbClr val="D6E4F7"/>
-                </a:solidFill>
-              </a:rPr>
-              <a:t>Track dates, milestones
-and resource allocation
-in the Gantt</a:t>
-            </a:r>
-          </a:p>
-        </p:txBody>
-      </p:sp>
-      <p:sp>
-        <p:nvSpPr>
-          <p:cNvPr id="23" name="TextBox 22"/>
-          <p:cNvSpPr txBox="1"/>
-          <p:nvPr/>
-        </p:nvSpPr>
-        <p:spPr>
-          <a:xfrm>
-            <a:off x="7191756" y="3611880"/>
-            <a:ext cx="274320" cy="274320"/>
-          </a:xfrm>
-          <a:prstGeom prst="rect">
-            <a:avLst/>
-          </a:prstGeom>
-          <a:noFill/>
-        </p:spPr>
-        <p:txBody>
-          <a:bodyPr wrap="square">
-            <a:spAutoFit/>
-          </a:bodyPr>
-          <a:lstStyle/>
-          <a:p>
-            <a:pPr algn="ctr"/>
-            <a:r>
-              <a:rPr sz="2200" b="1" i="0">
-                <a:solidFill>
-                  <a:srgbClr val="1A3A6B"/>
-                </a:solidFill>
-              </a:rPr>
-              <a:t>→</a:t>
-            </a:r>
-          </a:p>
-        </p:txBody>
-      </p:sp>
-      <p:sp>
-        <p:nvSpPr>
-          <p:cNvPr id="24" name="Rectangle 23"/>
+              <a:t>Eliminates parallel spreadsheets, long status meetings and the cost of delays detected too late.</a:t>
+            </a:r>
+          </a:p>
+        </p:txBody>
+      </p:sp>
+      <p:sp>
+        <p:nvSpPr>
+          <p:cNvPr id="15" name="Rectangle 14"/>
           <p:cNvSpPr/>
           <p:nvPr/>
         </p:nvSpPr>
         <p:spPr>
           <a:xfrm>
-            <a:off x="7466076" y="2011680"/>
-            <a:ext cx="2011680" cy="3474720"/>
+            <a:off x="6217920" y="3154680"/>
+            <a:ext cx="5577840" cy="1600200"/>
           </a:xfrm>
           <a:prstGeom prst="rect">
             <a:avLst/>
           </a:prstGeom>
           <a:solidFill>
-            <a:srgbClr val="2B579A"/>
+            <a:srgbClr val="FFFFFF"/>
           </a:solidFill>
           <a:ln>
             <a:solidFill>
-              <a:srgbClr val="2B579A"/>
+              <a:srgbClr val="FFFFFF"/>
             </a:solidFill>
           </a:ln>
         </p:spPr>
@@ -7977,14 +7942,14 @@
       </p:sp>
       <p:sp>
         <p:nvSpPr>
-          <p:cNvPr id="25" name="Rectangle 24"/>
+          <p:cNvPr id="16" name="Rectangle 15"/>
           <p:cNvSpPr/>
           <p:nvPr/>
         </p:nvSpPr>
         <p:spPr>
           <a:xfrm>
-            <a:off x="8151876" y="2176272"/>
-            <a:ext cx="640080" cy="640080"/>
+            <a:off x="6217920" y="3154680"/>
+            <a:ext cx="64008" cy="1600200"/>
           </a:xfrm>
           <a:prstGeom prst="rect">
             <a:avLst/>
@@ -8022,14 +7987,14 @@
       </p:sp>
       <p:sp>
         <p:nvSpPr>
-          <p:cNvPr id="26" name="TextBox 25"/>
+          <p:cNvPr id="17" name="TextBox 16"/>
           <p:cNvSpPr txBox="1"/>
           <p:nvPr/>
         </p:nvSpPr>
         <p:spPr>
           <a:xfrm>
-            <a:off x="8151876" y="2176272"/>
-            <a:ext cx="640080" cy="640080"/>
+            <a:off x="6419088" y="3264408"/>
+            <a:ext cx="5257800" cy="1417320"/>
           </a:xfrm>
           <a:prstGeom prst="rect">
             <a:avLst/>
@@ -8042,142 +8007,52 @@
           </a:bodyPr>
           <a:lstStyle/>
           <a:p>
-            <a:pPr algn="ctr"/>
-            <a:r>
-              <a:rPr sz="2000" b="1" i="0">
-                <a:solidFill>
-                  <a:srgbClr val="FFFFFF"/>
+            <a:r>
+              <a:rPr sz="1200" b="1">
+                <a:solidFill>
+                  <a:srgbClr val="1A3A6B"/>
                 </a:solidFill>
               </a:rPr>
-              <a:t>4</a:t>
-            </a:r>
-          </a:p>
-        </p:txBody>
-      </p:sp>
-      <p:sp>
-        <p:nvSpPr>
-          <p:cNvPr id="27" name="TextBox 26"/>
-          <p:cNvSpPr txBox="1"/>
-          <p:nvPr/>
-        </p:nvSpPr>
-        <p:spPr>
-          <a:xfrm>
-            <a:off x="7557516" y="3017520"/>
-            <a:ext cx="1828800" cy="548640"/>
-          </a:xfrm>
-          <a:prstGeom prst="rect">
-            <a:avLst/>
-          </a:prstGeom>
-          <a:noFill/>
-        </p:spPr>
-        <p:txBody>
-          <a:bodyPr wrap="square">
-            <a:spAutoFit/>
-          </a:bodyPr>
-          <a:lstStyle/>
-          <a:p>
-            <a:pPr algn="ctr"/>
-            <a:r>
-              <a:rPr sz="1400" b="1" i="0">
-                <a:solidFill>
-                  <a:srgbClr val="FFFFFF"/>
+              <a:t>📈  Data-driven decisions</a:t>
+            </a:r>
+          </a:p>
+          <a:p>
+            <a:pPr algn="l">
+              <a:spcBef>
+                <a:spcPts val="500"/>
+              </a:spcBef>
+            </a:pPr>
+            <a:r>
+              <a:rPr sz="1050" b="0" i="0">
+                <a:solidFill>
+                  <a:srgbClr val="555F6E"/>
                 </a:solidFill>
               </a:rPr>
-              <a:t>Sync</a:t>
-            </a:r>
-          </a:p>
-        </p:txBody>
-      </p:sp>
-      <p:sp>
-        <p:nvSpPr>
-          <p:cNvPr id="28" name="TextBox 27"/>
-          <p:cNvSpPr txBox="1"/>
-          <p:nvPr/>
-        </p:nvSpPr>
-        <p:spPr>
-          <a:xfrm>
-            <a:off x="7557516" y="3703320"/>
-            <a:ext cx="1828800" cy="1645920"/>
-          </a:xfrm>
-          <a:prstGeom prst="rect">
-            <a:avLst/>
-          </a:prstGeom>
-          <a:noFill/>
-        </p:spPr>
-        <p:txBody>
-          <a:bodyPr wrap="square">
-            <a:spAutoFit/>
-          </a:bodyPr>
-          <a:lstStyle/>
-          <a:p>
-            <a:pPr algn="ctr"/>
-            <a:r>
-              <a:rPr sz="1100" b="0" i="0">
-                <a:solidFill>
-                  <a:srgbClr val="D6E4F7"/>
-                </a:solidFill>
-              </a:rPr>
-              <a:t>Send dates, hours, states
-and new work items back
-to DevOps</a:t>
-            </a:r>
-          </a:p>
-        </p:txBody>
-      </p:sp>
-      <p:sp>
-        <p:nvSpPr>
-          <p:cNvPr id="29" name="TextBox 28"/>
-          <p:cNvSpPr txBox="1"/>
-          <p:nvPr/>
-        </p:nvSpPr>
-        <p:spPr>
-          <a:xfrm>
-            <a:off x="9569196" y="3611880"/>
-            <a:ext cx="274320" cy="274320"/>
-          </a:xfrm>
-          <a:prstGeom prst="rect">
-            <a:avLst/>
-          </a:prstGeom>
-          <a:noFill/>
-        </p:spPr>
-        <p:txBody>
-          <a:bodyPr wrap="square">
-            <a:spAutoFit/>
-          </a:bodyPr>
-          <a:lstStyle/>
-          <a:p>
-            <a:pPr algn="ctr"/>
-            <a:r>
-              <a:rPr sz="2200" b="1" i="0">
-                <a:solidFill>
-                  <a:srgbClr val="1A3A6B"/>
-                </a:solidFill>
-              </a:rPr>
-              <a:t>→</a:t>
-            </a:r>
-          </a:p>
-        </p:txBody>
-      </p:sp>
-      <p:sp>
-        <p:nvSpPr>
-          <p:cNvPr id="30" name="Rectangle 29"/>
+              <a:t>Automatic Health Check, resource allocation and proactive delay alerts give management precise information for fast decisions.</a:t>
+            </a:r>
+          </a:p>
+        </p:txBody>
+      </p:sp>
+      <p:sp>
+        <p:nvSpPr>
+          <p:cNvPr id="18" name="Rectangle 17"/>
           <p:cNvSpPr/>
           <p:nvPr/>
         </p:nvSpPr>
         <p:spPr>
           <a:xfrm>
-            <a:off x="9843516" y="2011680"/>
-            <a:ext cx="2011680" cy="3474720"/>
+            <a:off x="365760" y="4892040"/>
+            <a:ext cx="5577840" cy="1600200"/>
           </a:xfrm>
           <a:prstGeom prst="rect">
             <a:avLst/>
           </a:prstGeom>
           <a:solidFill>
-            <a:srgbClr val="2B579A"/>
+            <a:srgbClr val="FFFFFF"/>
           </a:solidFill>
           <a:ln>
             <a:solidFill>
-              <a:srgbClr val="2B579A"/>
+              <a:srgbClr val="FFFFFF"/>
             </a:solidFill>
           </a:ln>
         </p:spPr>
@@ -8205,14 +8080,14 @@
       </p:sp>
       <p:sp>
         <p:nvSpPr>
-          <p:cNvPr id="31" name="Rectangle 30"/>
+          <p:cNvPr id="19" name="Rectangle 18"/>
           <p:cNvSpPr/>
           <p:nvPr/>
         </p:nvSpPr>
         <p:spPr>
           <a:xfrm>
-            <a:off x="10529316" y="2176272"/>
-            <a:ext cx="640080" cy="640080"/>
+            <a:off x="365760" y="4892040"/>
+            <a:ext cx="64008" cy="1600200"/>
           </a:xfrm>
           <a:prstGeom prst="rect">
             <a:avLst/>
@@ -8250,14 +8125,14 @@
       </p:sp>
       <p:sp>
         <p:nvSpPr>
-          <p:cNvPr id="32" name="TextBox 31"/>
+          <p:cNvPr id="20" name="TextBox 19"/>
           <p:cNvSpPr txBox="1"/>
           <p:nvPr/>
         </p:nvSpPr>
         <p:spPr>
           <a:xfrm>
-            <a:off x="10529316" y="2176272"/>
-            <a:ext cx="640080" cy="640080"/>
+            <a:off x="566928" y="5001768"/>
+            <a:ext cx="5257800" cy="1417320"/>
           </a:xfrm>
           <a:prstGeom prst="rect">
             <a:avLst/>
@@ -8270,28 +8145,132 @@
           </a:bodyPr>
           <a:lstStyle/>
           <a:p>
-            <a:pPr algn="ctr"/>
-            <a:r>
-              <a:rPr sz="2000" b="1" i="0">
-                <a:solidFill>
-                  <a:srgbClr val="FFFFFF"/>
+            <a:r>
+              <a:rPr sz="1200" b="1">
+                <a:solidFill>
+                  <a:srgbClr val="1A3A6B"/>
                 </a:solidFill>
               </a:rPr>
-              <a:t>5</a:t>
-            </a:r>
-          </a:p>
-        </p:txBody>
-      </p:sp>
-      <p:sp>
-        <p:nvSpPr>
-          <p:cNvPr id="33" name="TextBox 32"/>
+              <a:t>🔒  Security and control</a:t>
+            </a:r>
+          </a:p>
+          <a:p>
+            <a:pPr algn="l">
+              <a:spcBef>
+                <a:spcPts val="500"/>
+              </a:spcBef>
+            </a:pPr>
+            <a:r>
+              <a:rPr sz="1050" b="0" i="0">
+                <a:solidFill>
+                  <a:srgbClr val="555F6E"/>
+                </a:solidFill>
+              </a:rPr>
+              <a:t>Azure DevOps credentials protected by DPAPI (Windows per-user encryption). Project data stays in a local file — no mandatory cloud. Local AI runs the model on your own machine, sending no project data out.</a:t>
+            </a:r>
+          </a:p>
+        </p:txBody>
+      </p:sp>
+      <p:sp>
+        <p:nvSpPr>
+          <p:cNvPr id="21" name="Rectangle 20"/>
+          <p:cNvSpPr/>
+          <p:nvPr/>
+        </p:nvSpPr>
+        <p:spPr>
+          <a:xfrm>
+            <a:off x="6217920" y="4892040"/>
+            <a:ext cx="5577840" cy="1600200"/>
+          </a:xfrm>
+          <a:prstGeom prst="rect">
+            <a:avLst/>
+          </a:prstGeom>
+          <a:solidFill>
+            <a:srgbClr val="FFFFFF"/>
+          </a:solidFill>
+          <a:ln>
+            <a:solidFill>
+              <a:srgbClr val="FFFFFF"/>
+            </a:solidFill>
+          </a:ln>
+        </p:spPr>
+        <p:style>
+          <a:lnRef idx="1">
+            <a:schemeClr val="accent1"/>
+          </a:lnRef>
+          <a:fillRef idx="3">
+            <a:schemeClr val="accent1"/>
+          </a:fillRef>
+          <a:effectRef idx="2">
+            <a:schemeClr val="accent1"/>
+          </a:effectRef>
+          <a:fontRef idx="minor">
+            <a:schemeClr val="lt1"/>
+          </a:fontRef>
+        </p:style>
+        <p:txBody>
+          <a:bodyPr rtlCol="0" anchor="ctr"/>
+          <a:lstStyle/>
+          <a:p>
+            <a:pPr algn="ctr"/>
+          </a:p>
+        </p:txBody>
+      </p:sp>
+      <p:sp>
+        <p:nvSpPr>
+          <p:cNvPr id="22" name="Rectangle 21"/>
+          <p:cNvSpPr/>
+          <p:nvPr/>
+        </p:nvSpPr>
+        <p:spPr>
+          <a:xfrm>
+            <a:off x="6217920" y="4892040"/>
+            <a:ext cx="64008" cy="1600200"/>
+          </a:xfrm>
+          <a:prstGeom prst="rect">
+            <a:avLst/>
+          </a:prstGeom>
+          <a:solidFill>
+            <a:srgbClr val="E87B00"/>
+          </a:solidFill>
+          <a:ln>
+            <a:solidFill>
+              <a:srgbClr val="E87B00"/>
+            </a:solidFill>
+          </a:ln>
+        </p:spPr>
+        <p:style>
+          <a:lnRef idx="1">
+            <a:schemeClr val="accent1"/>
+          </a:lnRef>
+          <a:fillRef idx="3">
+            <a:schemeClr val="accent1"/>
+          </a:fillRef>
+          <a:effectRef idx="2">
+            <a:schemeClr val="accent1"/>
+          </a:effectRef>
+          <a:fontRef idx="minor">
+            <a:schemeClr val="lt1"/>
+          </a:fontRef>
+        </p:style>
+        <p:txBody>
+          <a:bodyPr rtlCol="0" anchor="ctr"/>
+          <a:lstStyle/>
+          <a:p>
+            <a:pPr algn="ctr"/>
+          </a:p>
+        </p:txBody>
+      </p:sp>
+      <p:sp>
+        <p:nvSpPr>
+          <p:cNvPr id="23" name="TextBox 22"/>
           <p:cNvSpPr txBox="1"/>
           <p:nvPr/>
         </p:nvSpPr>
         <p:spPr>
           <a:xfrm>
-            <a:off x="9934956" y="3017520"/>
-            <a:ext cx="1828800" cy="548640"/>
+            <a:off x="6419088" y="5001768"/>
+            <a:ext cx="5257800" cy="1417320"/>
           </a:xfrm>
           <a:prstGeom prst="rect">
             <a:avLst/>
@@ -8304,50 +8283,28 @@
           </a:bodyPr>
           <a:lstStyle/>
           <a:p>
-            <a:pPr algn="ctr"/>
-            <a:r>
-              <a:rPr sz="1400" b="1" i="0">
-                <a:solidFill>
-                  <a:srgbClr val="FFFFFF"/>
+            <a:r>
+              <a:rPr sz="1200" b="1">
+                <a:solidFill>
+                  <a:srgbClr val="1A3A6B"/>
                 </a:solidFill>
               </a:rPr>
-              <a:t>Monitor</a:t>
-            </a:r>
-          </a:p>
-        </p:txBody>
-      </p:sp>
-      <p:sp>
-        <p:nvSpPr>
-          <p:cNvPr id="34" name="TextBox 33"/>
-          <p:cNvSpPr txBox="1"/>
-          <p:nvPr/>
-        </p:nvSpPr>
-        <p:spPr>
-          <a:xfrm>
-            <a:off x="9934956" y="3703320"/>
-            <a:ext cx="1828800" cy="1645920"/>
-          </a:xfrm>
-          <a:prstGeom prst="rect">
-            <a:avLst/>
-          </a:prstGeom>
-          <a:noFill/>
-        </p:spPr>
-        <p:txBody>
-          <a:bodyPr wrap="square">
-            <a:spAutoFit/>
-          </a:bodyPr>
-          <a:lstStyle/>
-          <a:p>
-            <a:pPr algn="ctr"/>
-            <a:r>
-              <a:rPr sz="1100" b="0" i="0">
-                <a:solidFill>
-                  <a:srgbClr val="D6E4F7"/>
+              <a:t>📦  Simple deployment</a:t>
+            </a:r>
+          </a:p>
+          <a:p>
+            <a:pPr algn="l">
+              <a:spcBef>
+                <a:spcPts val="500"/>
+              </a:spcBef>
+            </a:pPr>
+            <a:r>
+              <a:rPr sz="1050" b="0" i="0">
+                <a:solidFill>
+                  <a:srgbClr val="555F6E"/>
                 </a:solidFill>
               </a:rPr>
-              <a:t>Automatic Health Check
-alerts delays, blockers
-and overloads</a:t>
+              <a:t>Desktop application with its own installer: no server, no database and no extra infrastructure. Ready in minutes.</a:t>
             </a:r>
           </a:p>
         </p:txBody>
@@ -8534,7 +8491,7 @@
                   <a:srgbClr val="FFFFFF"/>
                 </a:solidFill>
               </a:rPr>
-              <a:t>Who NXProject is for</a:t>
+              <a:t>How it works — workflow</a:t>
             </a:r>
           </a:p>
         </p:txBody>
@@ -8547,18 +8504,18 @@
         </p:nvSpPr>
         <p:spPr>
           <a:xfrm>
-            <a:off x="457200" y="1554480"/>
-            <a:ext cx="2651760" cy="4663440"/>
+            <a:off x="196596" y="2011680"/>
+            <a:ext cx="1737360" cy="3474720"/>
           </a:xfrm>
           <a:prstGeom prst="rect">
             <a:avLst/>
           </a:prstGeom>
           <a:solidFill>
-            <a:srgbClr val="FFFFFF"/>
+            <a:srgbClr val="2B579A"/>
           </a:solidFill>
           <a:ln>
             <a:solidFill>
-              <a:srgbClr val="FFFFFF"/>
+              <a:srgbClr val="2B579A"/>
             </a:solidFill>
           </a:ln>
         </p:spPr>
@@ -8592,8 +8549,8 @@
         </p:nvSpPr>
         <p:spPr>
           <a:xfrm>
-            <a:off x="457200" y="1554480"/>
-            <a:ext cx="2651760" cy="54864"/>
+            <a:off x="745236" y="2176272"/>
+            <a:ext cx="640080" cy="640080"/>
           </a:xfrm>
           <a:prstGeom prst="rect">
             <a:avLst/>
@@ -8637,8 +8594,8 @@
         </p:nvSpPr>
         <p:spPr>
           <a:xfrm>
-            <a:off x="457200" y="1737360"/>
-            <a:ext cx="2651760" cy="640080"/>
+            <a:off x="745236" y="2176272"/>
+            <a:ext cx="640080" cy="640080"/>
           </a:xfrm>
           <a:prstGeom prst="rect">
             <a:avLst/>
@@ -8653,12 +8610,12 @@
           <a:p>
             <a:pPr algn="ctr"/>
             <a:r>
-              <a:rPr sz="3400" b="0" i="0">
-                <a:solidFill>
-                  <a:srgbClr val="2D2D2D"/>
+              <a:rPr sz="2000" b="1" i="0">
+                <a:solidFill>
+                  <a:srgbClr val="FFFFFF"/>
                 </a:solidFill>
               </a:rPr>
-              <a:t>🧑‍💼</a:t>
+              <a:t>1</a:t>
             </a:r>
           </a:p>
         </p:txBody>
@@ -8671,8 +8628,8 @@
         </p:nvSpPr>
         <p:spPr>
           <a:xfrm>
-            <a:off x="548640" y="2468880"/>
-            <a:ext cx="2468880" cy="731520"/>
+            <a:off x="288036" y="3017520"/>
+            <a:ext cx="1554480" cy="548640"/>
           </a:xfrm>
           <a:prstGeom prst="rect">
             <a:avLst/>
@@ -8689,11 +8646,10 @@
             <a:r>
               <a:rPr sz="1400" b="1" i="0">
                 <a:solidFill>
-                  <a:srgbClr val="1A3A6B"/>
+                  <a:srgbClr val="FFFFFF"/>
                 </a:solidFill>
               </a:rPr>
-              <a:t>Project
-Manager</a:t>
+              <a:t>Import</a:t>
             </a:r>
           </a:p>
         </p:txBody>
@@ -8706,8 +8662,8 @@
         </p:nvSpPr>
         <p:spPr>
           <a:xfrm>
-            <a:off x="594360" y="3291840"/>
-            <a:ext cx="2377440" cy="2743200"/>
+            <a:off x="288036" y="3703320"/>
+            <a:ext cx="1554480" cy="1645920"/>
           </a:xfrm>
           <a:prstGeom prst="rect">
             <a:avLst/>
@@ -8724,34 +8680,70 @@
             <a:r>
               <a:rPr sz="1100" b="0" i="0">
                 <a:solidFill>
-                  <a:srgbClr val="555F6E"/>
+                  <a:srgbClr val="D6E4F7"/>
                 </a:solidFill>
               </a:rPr>
-              <a:t>Schedule integrated with the backlog, delay alerts, dependency view and negotiated dates.</a:t>
-            </a:r>
-          </a:p>
-        </p:txBody>
-      </p:sp>
-      <p:sp>
-        <p:nvSpPr>
-          <p:cNvPr id="11" name="Rectangle 10"/>
+              <a:t>Connect to Azure DevOps
+and import the work item
+hierarchy</a:t>
+            </a:r>
+          </a:p>
+        </p:txBody>
+      </p:sp>
+      <p:sp>
+        <p:nvSpPr>
+          <p:cNvPr id="11" name="TextBox 10"/>
+          <p:cNvSpPr txBox="1"/>
+          <p:nvPr/>
+        </p:nvSpPr>
+        <p:spPr>
+          <a:xfrm>
+            <a:off x="2025396" y="3611880"/>
+            <a:ext cx="182880" cy="274320"/>
+          </a:xfrm>
+          <a:prstGeom prst="rect">
+            <a:avLst/>
+          </a:prstGeom>
+          <a:noFill/>
+        </p:spPr>
+        <p:txBody>
+          <a:bodyPr wrap="square">
+            <a:spAutoFit/>
+          </a:bodyPr>
+          <a:lstStyle/>
+          <a:p>
+            <a:pPr algn="ctr"/>
+            <a:r>
+              <a:rPr sz="2200" b="1" i="0">
+                <a:solidFill>
+                  <a:srgbClr val="1A3A6B"/>
+                </a:solidFill>
+              </a:rPr>
+              <a:t>→</a:t>
+            </a:r>
+          </a:p>
+        </p:txBody>
+      </p:sp>
+      <p:sp>
+        <p:nvSpPr>
+          <p:cNvPr id="12" name="Rectangle 11"/>
           <p:cNvSpPr/>
           <p:nvPr/>
         </p:nvSpPr>
         <p:spPr>
           <a:xfrm>
-            <a:off x="3383280" y="1554480"/>
-            <a:ext cx="2651760" cy="4663440"/>
+            <a:off x="2208276" y="2011680"/>
+            <a:ext cx="1737360" cy="3474720"/>
           </a:xfrm>
           <a:prstGeom prst="rect">
             <a:avLst/>
           </a:prstGeom>
           <a:solidFill>
-            <a:srgbClr val="FFFFFF"/>
+            <a:srgbClr val="2B579A"/>
           </a:solidFill>
           <a:ln>
             <a:solidFill>
-              <a:srgbClr val="FFFFFF"/>
+              <a:srgbClr val="2B579A"/>
             </a:solidFill>
           </a:ln>
         </p:spPr>
@@ -8779,14 +8771,14 @@
       </p:sp>
       <p:sp>
         <p:nvSpPr>
-          <p:cNvPr id="12" name="Rectangle 11"/>
+          <p:cNvPr id="13" name="Rectangle 12"/>
           <p:cNvSpPr/>
           <p:nvPr/>
         </p:nvSpPr>
         <p:spPr>
           <a:xfrm>
-            <a:off x="3383280" y="1554480"/>
-            <a:ext cx="2651760" cy="54864"/>
+            <a:off x="2756916" y="2176272"/>
+            <a:ext cx="640080" cy="640080"/>
           </a:xfrm>
           <a:prstGeom prst="rect">
             <a:avLst/>
@@ -8824,14 +8816,14 @@
       </p:sp>
       <p:sp>
         <p:nvSpPr>
-          <p:cNvPr id="13" name="TextBox 12"/>
+          <p:cNvPr id="14" name="TextBox 13"/>
           <p:cNvSpPr txBox="1"/>
           <p:nvPr/>
         </p:nvSpPr>
         <p:spPr>
           <a:xfrm>
-            <a:off x="3383280" y="1737360"/>
-            <a:ext cx="2651760" cy="640080"/>
+            <a:off x="2756916" y="2176272"/>
+            <a:ext cx="640080" cy="640080"/>
           </a:xfrm>
           <a:prstGeom prst="rect">
             <a:avLst/>
@@ -8846,26 +8838,26 @@
           <a:p>
             <a:pPr algn="ctr"/>
             <a:r>
-              <a:rPr sz="3400" b="0" i="0">
-                <a:solidFill>
-                  <a:srgbClr val="2D2D2D"/>
+              <a:rPr sz="2000" b="1" i="0">
+                <a:solidFill>
+                  <a:srgbClr val="FFFFFF"/>
                 </a:solidFill>
               </a:rPr>
-              <a:t>🔄</a:t>
-            </a:r>
-          </a:p>
-        </p:txBody>
-      </p:sp>
-      <p:sp>
-        <p:nvSpPr>
-          <p:cNvPr id="14" name="TextBox 13"/>
+              <a:t>2</a:t>
+            </a:r>
+          </a:p>
+        </p:txBody>
+      </p:sp>
+      <p:sp>
+        <p:nvSpPr>
+          <p:cNvPr id="15" name="TextBox 14"/>
           <p:cNvSpPr txBox="1"/>
           <p:nvPr/>
         </p:nvSpPr>
         <p:spPr>
           <a:xfrm>
-            <a:off x="3474720" y="2468880"/>
-            <a:ext cx="2468880" cy="731520"/>
+            <a:off x="2299716" y="3017520"/>
+            <a:ext cx="1554480" cy="548640"/>
           </a:xfrm>
           <a:prstGeom prst="rect">
             <a:avLst/>
@@ -8882,25 +8874,24 @@
             <a:r>
               <a:rPr sz="1400" b="1" i="0">
                 <a:solidFill>
-                  <a:srgbClr val="1A3A6B"/>
+                  <a:srgbClr val="FFFFFF"/>
                 </a:solidFill>
               </a:rPr>
-              <a:t>Scrum Master
-/ RTE</a:t>
-            </a:r>
-          </a:p>
-        </p:txBody>
-      </p:sp>
-      <p:sp>
-        <p:nvSpPr>
-          <p:cNvPr id="15" name="TextBox 14"/>
+              <a:t>Plan</a:t>
+            </a:r>
+          </a:p>
+        </p:txBody>
+      </p:sp>
+      <p:sp>
+        <p:nvSpPr>
+          <p:cNvPr id="16" name="TextBox 15"/>
           <p:cNvSpPr txBox="1"/>
           <p:nvPr/>
         </p:nvSpPr>
         <p:spPr>
           <a:xfrm>
-            <a:off x="3520440" y="3291840"/>
-            <a:ext cx="2377440" cy="2743200"/>
+            <a:off x="2299716" y="3703320"/>
+            <a:ext cx="1554480" cy="1645920"/>
           </a:xfrm>
           <a:prstGeom prst="rect">
             <a:avLst/>
@@ -8917,34 +8908,70 @@
             <a:r>
               <a:rPr sz="1100" b="0" i="0">
                 <a:solidFill>
-                  <a:srgbClr val="555F6E"/>
+                  <a:srgbClr val="D6E4F7"/>
                 </a:solidFill>
               </a:rPr>
-              <a:t>Sprint capacity, allocation conflicts, change impact and automatic cascade.</a:t>
-            </a:r>
-          </a:p>
-        </p:txBody>
-      </p:sp>
-      <p:sp>
-        <p:nvSpPr>
-          <p:cNvPr id="16" name="Rectangle 15"/>
+              <a:t>Adjust dates, duration,
+resources and dependencies
+in the schedule</a:t>
+            </a:r>
+          </a:p>
+        </p:txBody>
+      </p:sp>
+      <p:sp>
+        <p:nvSpPr>
+          <p:cNvPr id="17" name="TextBox 16"/>
+          <p:cNvSpPr txBox="1"/>
+          <p:nvPr/>
+        </p:nvSpPr>
+        <p:spPr>
+          <a:xfrm>
+            <a:off x="4037076" y="3611880"/>
+            <a:ext cx="182880" cy="274320"/>
+          </a:xfrm>
+          <a:prstGeom prst="rect">
+            <a:avLst/>
+          </a:prstGeom>
+          <a:noFill/>
+        </p:spPr>
+        <p:txBody>
+          <a:bodyPr wrap="square">
+            <a:spAutoFit/>
+          </a:bodyPr>
+          <a:lstStyle/>
+          <a:p>
+            <a:pPr algn="ctr"/>
+            <a:r>
+              <a:rPr sz="2200" b="1" i="0">
+                <a:solidFill>
+                  <a:srgbClr val="1A3A6B"/>
+                </a:solidFill>
+              </a:rPr>
+              <a:t>→</a:t>
+            </a:r>
+          </a:p>
+        </p:txBody>
+      </p:sp>
+      <p:sp>
+        <p:nvSpPr>
+          <p:cNvPr id="18" name="Rectangle 17"/>
           <p:cNvSpPr/>
           <p:nvPr/>
         </p:nvSpPr>
         <p:spPr>
           <a:xfrm>
-            <a:off x="6309360" y="1554480"/>
-            <a:ext cx="2651760" cy="4663440"/>
+            <a:off x="4219956" y="2011680"/>
+            <a:ext cx="1737360" cy="3474720"/>
           </a:xfrm>
           <a:prstGeom prst="rect">
             <a:avLst/>
           </a:prstGeom>
           <a:solidFill>
-            <a:srgbClr val="FFFFFF"/>
+            <a:srgbClr val="2B579A"/>
           </a:solidFill>
           <a:ln>
             <a:solidFill>
-              <a:srgbClr val="FFFFFF"/>
+              <a:srgbClr val="2B579A"/>
             </a:solidFill>
           </a:ln>
         </p:spPr>
@@ -8972,14 +8999,14 @@
       </p:sp>
       <p:sp>
         <p:nvSpPr>
-          <p:cNvPr id="17" name="Rectangle 16"/>
+          <p:cNvPr id="19" name="Rectangle 18"/>
           <p:cNvSpPr/>
           <p:nvPr/>
         </p:nvSpPr>
         <p:spPr>
           <a:xfrm>
-            <a:off x="6309360" y="1554480"/>
-            <a:ext cx="2651760" cy="54864"/>
+            <a:off x="4768596" y="2176272"/>
+            <a:ext cx="640080" cy="640080"/>
           </a:xfrm>
           <a:prstGeom prst="rect">
             <a:avLst/>
@@ -9017,14 +9044,14 @@
       </p:sp>
       <p:sp>
         <p:nvSpPr>
-          <p:cNvPr id="18" name="TextBox 17"/>
+          <p:cNvPr id="20" name="TextBox 19"/>
           <p:cNvSpPr txBox="1"/>
           <p:nvPr/>
         </p:nvSpPr>
         <p:spPr>
           <a:xfrm>
-            <a:off x="6309360" y="1737360"/>
-            <a:ext cx="2651760" cy="640080"/>
+            <a:off x="4768596" y="2176272"/>
+            <a:ext cx="640080" cy="640080"/>
           </a:xfrm>
           <a:prstGeom prst="rect">
             <a:avLst/>
@@ -9039,26 +9066,26 @@
           <a:p>
             <a:pPr algn="ctr"/>
             <a:r>
-              <a:rPr sz="3400" b="0" i="0">
-                <a:solidFill>
-                  <a:srgbClr val="2D2D2D"/>
+              <a:rPr sz="2000" b="1" i="0">
+                <a:solidFill>
+                  <a:srgbClr val="FFFFFF"/>
                 </a:solidFill>
               </a:rPr>
-              <a:t>💻</a:t>
-            </a:r>
-          </a:p>
-        </p:txBody>
-      </p:sp>
-      <p:sp>
-        <p:nvSpPr>
-          <p:cNvPr id="19" name="TextBox 18"/>
+              <a:t>3</a:t>
+            </a:r>
+          </a:p>
+        </p:txBody>
+      </p:sp>
+      <p:sp>
+        <p:nvSpPr>
+          <p:cNvPr id="21" name="TextBox 20"/>
           <p:cNvSpPr txBox="1"/>
           <p:nvPr/>
         </p:nvSpPr>
         <p:spPr>
           <a:xfrm>
-            <a:off x="6400800" y="2468880"/>
-            <a:ext cx="2468880" cy="731520"/>
+            <a:off x="4311396" y="3017520"/>
+            <a:ext cx="1554480" cy="548640"/>
           </a:xfrm>
           <a:prstGeom prst="rect">
             <a:avLst/>
@@ -9075,24 +9102,24 @@
             <a:r>
               <a:rPr sz="1400" b="1" i="0">
                 <a:solidFill>
-                  <a:srgbClr val="1A3A6B"/>
+                  <a:srgbClr val="FFFFFF"/>
                 </a:solidFill>
               </a:rPr>
-              <a:t>Tech Lead</a:t>
-            </a:r>
-          </a:p>
-        </p:txBody>
-      </p:sp>
-      <p:sp>
-        <p:nvSpPr>
-          <p:cNvPr id="20" name="TextBox 19"/>
+              <a:t>Visualize</a:t>
+            </a:r>
+          </a:p>
+        </p:txBody>
+      </p:sp>
+      <p:sp>
+        <p:nvSpPr>
+          <p:cNvPr id="22" name="TextBox 21"/>
           <p:cNvSpPr txBox="1"/>
           <p:nvPr/>
         </p:nvSpPr>
         <p:spPr>
           <a:xfrm>
-            <a:off x="6446520" y="3291840"/>
-            <a:ext cx="2377440" cy="2743200"/>
+            <a:off x="4311396" y="3703320"/>
+            <a:ext cx="1554480" cy="1645920"/>
           </a:xfrm>
           <a:prstGeom prst="rect">
             <a:avLst/>
@@ -9109,34 +9136,70 @@
             <a:r>
               <a:rPr sz="1100" b="0" i="0">
                 <a:solidFill>
-                  <a:srgbClr val="555F6E"/>
+                  <a:srgbClr val="D6E4F7"/>
                 </a:solidFill>
               </a:rPr>
-              <a:t>Feature and Story view with predecessors, hour estimates and traceability.</a:t>
-            </a:r>
-          </a:p>
-        </p:txBody>
-      </p:sp>
-      <p:sp>
-        <p:nvSpPr>
-          <p:cNvPr id="21" name="Rectangle 20"/>
+              <a:t>Track dates, milestones
+and resource allocation
+in the Gantt</a:t>
+            </a:r>
+          </a:p>
+        </p:txBody>
+      </p:sp>
+      <p:sp>
+        <p:nvSpPr>
+          <p:cNvPr id="23" name="TextBox 22"/>
+          <p:cNvSpPr txBox="1"/>
+          <p:nvPr/>
+        </p:nvSpPr>
+        <p:spPr>
+          <a:xfrm>
+            <a:off x="6048756" y="3611880"/>
+            <a:ext cx="182880" cy="274320"/>
+          </a:xfrm>
+          <a:prstGeom prst="rect">
+            <a:avLst/>
+          </a:prstGeom>
+          <a:noFill/>
+        </p:spPr>
+        <p:txBody>
+          <a:bodyPr wrap="square">
+            <a:spAutoFit/>
+          </a:bodyPr>
+          <a:lstStyle/>
+          <a:p>
+            <a:pPr algn="ctr"/>
+            <a:r>
+              <a:rPr sz="2200" b="1" i="0">
+                <a:solidFill>
+                  <a:srgbClr val="1A3A6B"/>
+                </a:solidFill>
+              </a:rPr>
+              <a:t>→</a:t>
+            </a:r>
+          </a:p>
+        </p:txBody>
+      </p:sp>
+      <p:sp>
+        <p:nvSpPr>
+          <p:cNvPr id="24" name="Rectangle 23"/>
           <p:cNvSpPr/>
           <p:nvPr/>
         </p:nvSpPr>
         <p:spPr>
           <a:xfrm>
-            <a:off x="9235440" y="1554480"/>
-            <a:ext cx="2651760" cy="4663440"/>
+            <a:off x="6231636" y="2011680"/>
+            <a:ext cx="1737360" cy="3474720"/>
           </a:xfrm>
           <a:prstGeom prst="rect">
             <a:avLst/>
           </a:prstGeom>
           <a:solidFill>
-            <a:srgbClr val="FFFFFF"/>
+            <a:srgbClr val="2B579A"/>
           </a:solidFill>
           <a:ln>
             <a:solidFill>
-              <a:srgbClr val="FFFFFF"/>
+              <a:srgbClr val="2B579A"/>
             </a:solidFill>
           </a:ln>
         </p:spPr>
@@ -9164,14 +9227,14 @@
       </p:sp>
       <p:sp>
         <p:nvSpPr>
-          <p:cNvPr id="22" name="Rectangle 21"/>
+          <p:cNvPr id="25" name="Rectangle 24"/>
           <p:cNvSpPr/>
           <p:nvPr/>
         </p:nvSpPr>
         <p:spPr>
           <a:xfrm>
-            <a:off x="9235440" y="1554480"/>
-            <a:ext cx="2651760" cy="54864"/>
+            <a:off x="6780276" y="2176272"/>
+            <a:ext cx="640080" cy="640080"/>
           </a:xfrm>
           <a:prstGeom prst="rect">
             <a:avLst/>
@@ -9209,14 +9272,14 @@
       </p:sp>
       <p:sp>
         <p:nvSpPr>
-          <p:cNvPr id="23" name="TextBox 22"/>
+          <p:cNvPr id="26" name="TextBox 25"/>
           <p:cNvSpPr txBox="1"/>
           <p:nvPr/>
         </p:nvSpPr>
         <p:spPr>
           <a:xfrm>
-            <a:off x="9235440" y="1737360"/>
-            <a:ext cx="2651760" cy="640080"/>
+            <a:off x="6780276" y="2176272"/>
+            <a:ext cx="640080" cy="640080"/>
           </a:xfrm>
           <a:prstGeom prst="rect">
             <a:avLst/>
@@ -9231,26 +9294,26 @@
           <a:p>
             <a:pPr algn="ctr"/>
             <a:r>
-              <a:rPr sz="3400" b="0" i="0">
-                <a:solidFill>
-                  <a:srgbClr val="2D2D2D"/>
+              <a:rPr sz="2000" b="1" i="0">
+                <a:solidFill>
+                  <a:srgbClr val="FFFFFF"/>
                 </a:solidFill>
               </a:rPr>
-              <a:t>📊</a:t>
-            </a:r>
-          </a:p>
-        </p:txBody>
-      </p:sp>
-      <p:sp>
-        <p:nvSpPr>
-          <p:cNvPr id="24" name="TextBox 23"/>
+              <a:t>4</a:t>
+            </a:r>
+          </a:p>
+        </p:txBody>
+      </p:sp>
+      <p:sp>
+        <p:nvSpPr>
+          <p:cNvPr id="27" name="TextBox 26"/>
           <p:cNvSpPr txBox="1"/>
           <p:nvPr/>
         </p:nvSpPr>
         <p:spPr>
           <a:xfrm>
-            <a:off x="9326880" y="2468880"/>
-            <a:ext cx="2468880" cy="731520"/>
+            <a:off x="6323076" y="3017520"/>
+            <a:ext cx="1554480" cy="548640"/>
           </a:xfrm>
           <a:prstGeom prst="rect">
             <a:avLst/>
@@ -9267,25 +9330,24 @@
             <a:r>
               <a:rPr sz="1400" b="1" i="0">
                 <a:solidFill>
-                  <a:srgbClr val="1A3A6B"/>
+                  <a:srgbClr val="FFFFFF"/>
                 </a:solidFill>
               </a:rPr>
-              <a:t>Management
-/ PMO</a:t>
-            </a:r>
-          </a:p>
-        </p:txBody>
-      </p:sp>
-      <p:sp>
-        <p:nvSpPr>
-          <p:cNvPr id="25" name="TextBox 24"/>
+              <a:t>Execute</a:t>
+            </a:r>
+          </a:p>
+        </p:txBody>
+      </p:sp>
+      <p:sp>
+        <p:nvSpPr>
+          <p:cNvPr id="28" name="TextBox 27"/>
           <p:cNvSpPr txBox="1"/>
           <p:nvPr/>
         </p:nvSpPr>
         <p:spPr>
           <a:xfrm>
-            <a:off x="9372600" y="3291840"/>
-            <a:ext cx="2377440" cy="2743200"/>
+            <a:off x="6323076" y="3703320"/>
+            <a:ext cx="1554480" cy="1645920"/>
           </a:xfrm>
           <a:prstGeom prst="rect">
             <a:avLst/>
@@ -9302,10 +9364,468 @@
             <a:r>
               <a:rPr sz="1100" b="0" i="0">
                 <a:solidFill>
-                  <a:srgbClr val="555F6E"/>
+                  <a:srgbClr val="D6E4F7"/>
                 </a:solidFill>
               </a:rPr>
-              <a:t>Consolidated portfolio view, export to MS Project/Excel and executive Health Check.</a:t>
+              <a:t>The team details the Tasks
+and runs the day to day
+in the TaskBoard</a:t>
+            </a:r>
+          </a:p>
+        </p:txBody>
+      </p:sp>
+      <p:sp>
+        <p:nvSpPr>
+          <p:cNvPr id="29" name="TextBox 28"/>
+          <p:cNvSpPr txBox="1"/>
+          <p:nvPr/>
+        </p:nvSpPr>
+        <p:spPr>
+          <a:xfrm>
+            <a:off x="8060436" y="3611880"/>
+            <a:ext cx="182880" cy="274320"/>
+          </a:xfrm>
+          <a:prstGeom prst="rect">
+            <a:avLst/>
+          </a:prstGeom>
+          <a:noFill/>
+        </p:spPr>
+        <p:txBody>
+          <a:bodyPr wrap="square">
+            <a:spAutoFit/>
+          </a:bodyPr>
+          <a:lstStyle/>
+          <a:p>
+            <a:pPr algn="ctr"/>
+            <a:r>
+              <a:rPr sz="2200" b="1" i="0">
+                <a:solidFill>
+                  <a:srgbClr val="1A3A6B"/>
+                </a:solidFill>
+              </a:rPr>
+              <a:t>→</a:t>
+            </a:r>
+          </a:p>
+        </p:txBody>
+      </p:sp>
+      <p:sp>
+        <p:nvSpPr>
+          <p:cNvPr id="30" name="Rectangle 29"/>
+          <p:cNvSpPr/>
+          <p:nvPr/>
+        </p:nvSpPr>
+        <p:spPr>
+          <a:xfrm>
+            <a:off x="8243316" y="2011680"/>
+            <a:ext cx="1737360" cy="3474720"/>
+          </a:xfrm>
+          <a:prstGeom prst="rect">
+            <a:avLst/>
+          </a:prstGeom>
+          <a:solidFill>
+            <a:srgbClr val="2B579A"/>
+          </a:solidFill>
+          <a:ln>
+            <a:solidFill>
+              <a:srgbClr val="2B579A"/>
+            </a:solidFill>
+          </a:ln>
+        </p:spPr>
+        <p:style>
+          <a:lnRef idx="1">
+            <a:schemeClr val="accent1"/>
+          </a:lnRef>
+          <a:fillRef idx="3">
+            <a:schemeClr val="accent1"/>
+          </a:fillRef>
+          <a:effectRef idx="2">
+            <a:schemeClr val="accent1"/>
+          </a:effectRef>
+          <a:fontRef idx="minor">
+            <a:schemeClr val="lt1"/>
+          </a:fontRef>
+        </p:style>
+        <p:txBody>
+          <a:bodyPr rtlCol="0" anchor="ctr"/>
+          <a:lstStyle/>
+          <a:p>
+            <a:pPr algn="ctr"/>
+          </a:p>
+        </p:txBody>
+      </p:sp>
+      <p:sp>
+        <p:nvSpPr>
+          <p:cNvPr id="31" name="Rectangle 30"/>
+          <p:cNvSpPr/>
+          <p:nvPr/>
+        </p:nvSpPr>
+        <p:spPr>
+          <a:xfrm>
+            <a:off x="8791956" y="2176272"/>
+            <a:ext cx="640080" cy="640080"/>
+          </a:xfrm>
+          <a:prstGeom prst="rect">
+            <a:avLst/>
+          </a:prstGeom>
+          <a:solidFill>
+            <a:srgbClr val="E87B00"/>
+          </a:solidFill>
+          <a:ln>
+            <a:solidFill>
+              <a:srgbClr val="E87B00"/>
+            </a:solidFill>
+          </a:ln>
+        </p:spPr>
+        <p:style>
+          <a:lnRef idx="1">
+            <a:schemeClr val="accent1"/>
+          </a:lnRef>
+          <a:fillRef idx="3">
+            <a:schemeClr val="accent1"/>
+          </a:fillRef>
+          <a:effectRef idx="2">
+            <a:schemeClr val="accent1"/>
+          </a:effectRef>
+          <a:fontRef idx="minor">
+            <a:schemeClr val="lt1"/>
+          </a:fontRef>
+        </p:style>
+        <p:txBody>
+          <a:bodyPr rtlCol="0" anchor="ctr"/>
+          <a:lstStyle/>
+          <a:p>
+            <a:pPr algn="ctr"/>
+          </a:p>
+        </p:txBody>
+      </p:sp>
+      <p:sp>
+        <p:nvSpPr>
+          <p:cNvPr id="32" name="TextBox 31"/>
+          <p:cNvSpPr txBox="1"/>
+          <p:nvPr/>
+        </p:nvSpPr>
+        <p:spPr>
+          <a:xfrm>
+            <a:off x="8791956" y="2176272"/>
+            <a:ext cx="640080" cy="640080"/>
+          </a:xfrm>
+          <a:prstGeom prst="rect">
+            <a:avLst/>
+          </a:prstGeom>
+          <a:noFill/>
+        </p:spPr>
+        <p:txBody>
+          <a:bodyPr wrap="square">
+            <a:spAutoFit/>
+          </a:bodyPr>
+          <a:lstStyle/>
+          <a:p>
+            <a:pPr algn="ctr"/>
+            <a:r>
+              <a:rPr sz="2000" b="1" i="0">
+                <a:solidFill>
+                  <a:srgbClr val="FFFFFF"/>
+                </a:solidFill>
+              </a:rPr>
+              <a:t>5</a:t>
+            </a:r>
+          </a:p>
+        </p:txBody>
+      </p:sp>
+      <p:sp>
+        <p:nvSpPr>
+          <p:cNvPr id="33" name="TextBox 32"/>
+          <p:cNvSpPr txBox="1"/>
+          <p:nvPr/>
+        </p:nvSpPr>
+        <p:spPr>
+          <a:xfrm>
+            <a:off x="8334756" y="3017520"/>
+            <a:ext cx="1554480" cy="548640"/>
+          </a:xfrm>
+          <a:prstGeom prst="rect">
+            <a:avLst/>
+          </a:prstGeom>
+          <a:noFill/>
+        </p:spPr>
+        <p:txBody>
+          <a:bodyPr wrap="square">
+            <a:spAutoFit/>
+          </a:bodyPr>
+          <a:lstStyle/>
+          <a:p>
+            <a:pPr algn="ctr"/>
+            <a:r>
+              <a:rPr sz="1400" b="1" i="0">
+                <a:solidFill>
+                  <a:srgbClr val="FFFFFF"/>
+                </a:solidFill>
+              </a:rPr>
+              <a:t>Sync</a:t>
+            </a:r>
+          </a:p>
+        </p:txBody>
+      </p:sp>
+      <p:sp>
+        <p:nvSpPr>
+          <p:cNvPr id="34" name="TextBox 33"/>
+          <p:cNvSpPr txBox="1"/>
+          <p:nvPr/>
+        </p:nvSpPr>
+        <p:spPr>
+          <a:xfrm>
+            <a:off x="8334756" y="3703320"/>
+            <a:ext cx="1554480" cy="1645920"/>
+          </a:xfrm>
+          <a:prstGeom prst="rect">
+            <a:avLst/>
+          </a:prstGeom>
+          <a:noFill/>
+        </p:spPr>
+        <p:txBody>
+          <a:bodyPr wrap="square">
+            <a:spAutoFit/>
+          </a:bodyPr>
+          <a:lstStyle/>
+          <a:p>
+            <a:pPr algn="ctr"/>
+            <a:r>
+              <a:rPr sz="1100" b="0" i="0">
+                <a:solidFill>
+                  <a:srgbClr val="D6E4F7"/>
+                </a:solidFill>
+              </a:rPr>
+              <a:t>Send dates, hours, states
+and new work items back
+to DevOps</a:t>
+            </a:r>
+          </a:p>
+        </p:txBody>
+      </p:sp>
+      <p:sp>
+        <p:nvSpPr>
+          <p:cNvPr id="35" name="TextBox 34"/>
+          <p:cNvSpPr txBox="1"/>
+          <p:nvPr/>
+        </p:nvSpPr>
+        <p:spPr>
+          <a:xfrm>
+            <a:off x="10072116" y="3611880"/>
+            <a:ext cx="182880" cy="274320"/>
+          </a:xfrm>
+          <a:prstGeom prst="rect">
+            <a:avLst/>
+          </a:prstGeom>
+          <a:noFill/>
+        </p:spPr>
+        <p:txBody>
+          <a:bodyPr wrap="square">
+            <a:spAutoFit/>
+          </a:bodyPr>
+          <a:lstStyle/>
+          <a:p>
+            <a:pPr algn="ctr"/>
+            <a:r>
+              <a:rPr sz="2200" b="1" i="0">
+                <a:solidFill>
+                  <a:srgbClr val="1A3A6B"/>
+                </a:solidFill>
+              </a:rPr>
+              <a:t>→</a:t>
+            </a:r>
+          </a:p>
+        </p:txBody>
+      </p:sp>
+      <p:sp>
+        <p:nvSpPr>
+          <p:cNvPr id="36" name="Rectangle 35"/>
+          <p:cNvSpPr/>
+          <p:nvPr/>
+        </p:nvSpPr>
+        <p:spPr>
+          <a:xfrm>
+            <a:off x="10254996" y="2011680"/>
+            <a:ext cx="1737360" cy="3474720"/>
+          </a:xfrm>
+          <a:prstGeom prst="rect">
+            <a:avLst/>
+          </a:prstGeom>
+          <a:solidFill>
+            <a:srgbClr val="2B579A"/>
+          </a:solidFill>
+          <a:ln>
+            <a:solidFill>
+              <a:srgbClr val="2B579A"/>
+            </a:solidFill>
+          </a:ln>
+        </p:spPr>
+        <p:style>
+          <a:lnRef idx="1">
+            <a:schemeClr val="accent1"/>
+          </a:lnRef>
+          <a:fillRef idx="3">
+            <a:schemeClr val="accent1"/>
+          </a:fillRef>
+          <a:effectRef idx="2">
+            <a:schemeClr val="accent1"/>
+          </a:effectRef>
+          <a:fontRef idx="minor">
+            <a:schemeClr val="lt1"/>
+          </a:fontRef>
+        </p:style>
+        <p:txBody>
+          <a:bodyPr rtlCol="0" anchor="ctr"/>
+          <a:lstStyle/>
+          <a:p>
+            <a:pPr algn="ctr"/>
+          </a:p>
+        </p:txBody>
+      </p:sp>
+      <p:sp>
+        <p:nvSpPr>
+          <p:cNvPr id="37" name="Rectangle 36"/>
+          <p:cNvSpPr/>
+          <p:nvPr/>
+        </p:nvSpPr>
+        <p:spPr>
+          <a:xfrm>
+            <a:off x="10803636" y="2176272"/>
+            <a:ext cx="640080" cy="640080"/>
+          </a:xfrm>
+          <a:prstGeom prst="rect">
+            <a:avLst/>
+          </a:prstGeom>
+          <a:solidFill>
+            <a:srgbClr val="E87B00"/>
+          </a:solidFill>
+          <a:ln>
+            <a:solidFill>
+              <a:srgbClr val="E87B00"/>
+            </a:solidFill>
+          </a:ln>
+        </p:spPr>
+        <p:style>
+          <a:lnRef idx="1">
+            <a:schemeClr val="accent1"/>
+          </a:lnRef>
+          <a:fillRef idx="3">
+            <a:schemeClr val="accent1"/>
+          </a:fillRef>
+          <a:effectRef idx="2">
+            <a:schemeClr val="accent1"/>
+          </a:effectRef>
+          <a:fontRef idx="minor">
+            <a:schemeClr val="lt1"/>
+          </a:fontRef>
+        </p:style>
+        <p:txBody>
+          <a:bodyPr rtlCol="0" anchor="ctr"/>
+          <a:lstStyle/>
+          <a:p>
+            <a:pPr algn="ctr"/>
+          </a:p>
+        </p:txBody>
+      </p:sp>
+      <p:sp>
+        <p:nvSpPr>
+          <p:cNvPr id="38" name="TextBox 37"/>
+          <p:cNvSpPr txBox="1"/>
+          <p:nvPr/>
+        </p:nvSpPr>
+        <p:spPr>
+          <a:xfrm>
+            <a:off x="10803636" y="2176272"/>
+            <a:ext cx="640080" cy="640080"/>
+          </a:xfrm>
+          <a:prstGeom prst="rect">
+            <a:avLst/>
+          </a:prstGeom>
+          <a:noFill/>
+        </p:spPr>
+        <p:txBody>
+          <a:bodyPr wrap="square">
+            <a:spAutoFit/>
+          </a:bodyPr>
+          <a:lstStyle/>
+          <a:p>
+            <a:pPr algn="ctr"/>
+            <a:r>
+              <a:rPr sz="2000" b="1" i="0">
+                <a:solidFill>
+                  <a:srgbClr val="FFFFFF"/>
+                </a:solidFill>
+              </a:rPr>
+              <a:t>6</a:t>
+            </a:r>
+          </a:p>
+        </p:txBody>
+      </p:sp>
+      <p:sp>
+        <p:nvSpPr>
+          <p:cNvPr id="39" name="TextBox 38"/>
+          <p:cNvSpPr txBox="1"/>
+          <p:nvPr/>
+        </p:nvSpPr>
+        <p:spPr>
+          <a:xfrm>
+            <a:off x="10346436" y="3017520"/>
+            <a:ext cx="1554480" cy="548640"/>
+          </a:xfrm>
+          <a:prstGeom prst="rect">
+            <a:avLst/>
+          </a:prstGeom>
+          <a:noFill/>
+        </p:spPr>
+        <p:txBody>
+          <a:bodyPr wrap="square">
+            <a:spAutoFit/>
+          </a:bodyPr>
+          <a:lstStyle/>
+          <a:p>
+            <a:pPr algn="ctr"/>
+            <a:r>
+              <a:rPr sz="1400" b="1" i="0">
+                <a:solidFill>
+                  <a:srgbClr val="FFFFFF"/>
+                </a:solidFill>
+              </a:rPr>
+              <a:t>Monitor</a:t>
+            </a:r>
+          </a:p>
+        </p:txBody>
+      </p:sp>
+      <p:sp>
+        <p:nvSpPr>
+          <p:cNvPr id="40" name="TextBox 39"/>
+          <p:cNvSpPr txBox="1"/>
+          <p:nvPr/>
+        </p:nvSpPr>
+        <p:spPr>
+          <a:xfrm>
+            <a:off x="10346436" y="3703320"/>
+            <a:ext cx="1554480" cy="1645920"/>
+          </a:xfrm>
+          <a:prstGeom prst="rect">
+            <a:avLst/>
+          </a:prstGeom>
+          <a:noFill/>
+        </p:spPr>
+        <p:txBody>
+          <a:bodyPr wrap="square">
+            <a:spAutoFit/>
+          </a:bodyPr>
+          <a:lstStyle/>
+          <a:p>
+            <a:pPr algn="ctr"/>
+            <a:r>
+              <a:rPr sz="1100" b="0" i="0">
+                <a:solidFill>
+                  <a:srgbClr val="D6E4F7"/>
+                </a:solidFill>
+              </a:rPr>
+              <a:t>Automatic Health Check
+alerts delays, blockers
+and overloads</a:t>
             </a:r>
           </a:p>
         </p:txBody>
@@ -9319,6 +9839,964 @@
 </file>
 
 <file path=ppt/slides/slide8.xml><?xml version="1.0" encoding="utf-8"?>
+<p:sld xmlns:a="http://schemas.openxmlformats.org/drawingml/2006/main" xmlns:p="http://schemas.openxmlformats.org/presentationml/2006/main" xmlns:r="http://schemas.openxmlformats.org/officeDocument/2006/relationships">
+  <p:cSld>
+    <p:spTree>
+      <p:nvGrpSpPr>
+        <p:cNvPr id="1" name=""/>
+        <p:cNvGrpSpPr/>
+        <p:nvPr/>
+      </p:nvGrpSpPr>
+      <p:grpSpPr/>
+      <p:sp>
+        <p:nvSpPr>
+          <p:cNvPr id="2" name="Rectangle 1"/>
+          <p:cNvSpPr/>
+          <p:nvPr/>
+        </p:nvSpPr>
+        <p:spPr>
+          <a:xfrm>
+            <a:off x="0" y="0"/>
+            <a:ext cx="12188952" cy="6858000"/>
+          </a:xfrm>
+          <a:prstGeom prst="rect">
+            <a:avLst/>
+          </a:prstGeom>
+          <a:solidFill>
+            <a:srgbClr val="F4F6FB"/>
+          </a:solidFill>
+          <a:ln>
+            <a:solidFill>
+              <a:srgbClr val="F4F6FB"/>
+            </a:solidFill>
+          </a:ln>
+        </p:spPr>
+        <p:style>
+          <a:lnRef idx="1">
+            <a:schemeClr val="accent1"/>
+          </a:lnRef>
+          <a:fillRef idx="3">
+            <a:schemeClr val="accent1"/>
+          </a:fillRef>
+          <a:effectRef idx="2">
+            <a:schemeClr val="accent1"/>
+          </a:effectRef>
+          <a:fontRef idx="minor">
+            <a:schemeClr val="lt1"/>
+          </a:fontRef>
+        </p:style>
+        <p:txBody>
+          <a:bodyPr rtlCol="0" anchor="ctr"/>
+          <a:lstStyle/>
+          <a:p>
+            <a:pPr algn="ctr"/>
+          </a:p>
+        </p:txBody>
+      </p:sp>
+      <p:sp>
+        <p:nvSpPr>
+          <p:cNvPr id="3" name="Rectangle 2"/>
+          <p:cNvSpPr/>
+          <p:nvPr/>
+        </p:nvSpPr>
+        <p:spPr>
+          <a:xfrm>
+            <a:off x="0" y="0"/>
+            <a:ext cx="12188952" cy="1188720"/>
+          </a:xfrm>
+          <a:prstGeom prst="rect">
+            <a:avLst/>
+          </a:prstGeom>
+          <a:solidFill>
+            <a:srgbClr val="1A3A6B"/>
+          </a:solidFill>
+          <a:ln>
+            <a:solidFill>
+              <a:srgbClr val="1A3A6B"/>
+            </a:solidFill>
+          </a:ln>
+        </p:spPr>
+        <p:style>
+          <a:lnRef idx="1">
+            <a:schemeClr val="accent1"/>
+          </a:lnRef>
+          <a:fillRef idx="3">
+            <a:schemeClr val="accent1"/>
+          </a:fillRef>
+          <a:effectRef idx="2">
+            <a:schemeClr val="accent1"/>
+          </a:effectRef>
+          <a:fontRef idx="minor">
+            <a:schemeClr val="lt1"/>
+          </a:fontRef>
+        </p:style>
+        <p:txBody>
+          <a:bodyPr rtlCol="0" anchor="ctr"/>
+          <a:lstStyle/>
+          <a:p>
+            <a:pPr algn="ctr"/>
+          </a:p>
+        </p:txBody>
+      </p:sp>
+      <p:sp>
+        <p:nvSpPr>
+          <p:cNvPr id="4" name="Rectangle 3"/>
+          <p:cNvSpPr/>
+          <p:nvPr/>
+        </p:nvSpPr>
+        <p:spPr>
+          <a:xfrm>
+            <a:off x="0" y="1188720"/>
+            <a:ext cx="64008" cy="5669280"/>
+          </a:xfrm>
+          <a:prstGeom prst="rect">
+            <a:avLst/>
+          </a:prstGeom>
+          <a:solidFill>
+            <a:srgbClr val="E87B00"/>
+          </a:solidFill>
+          <a:ln>
+            <a:solidFill>
+              <a:srgbClr val="E87B00"/>
+            </a:solidFill>
+          </a:ln>
+        </p:spPr>
+        <p:style>
+          <a:lnRef idx="1">
+            <a:schemeClr val="accent1"/>
+          </a:lnRef>
+          <a:fillRef idx="3">
+            <a:schemeClr val="accent1"/>
+          </a:fillRef>
+          <a:effectRef idx="2">
+            <a:schemeClr val="accent1"/>
+          </a:effectRef>
+          <a:fontRef idx="minor">
+            <a:schemeClr val="lt1"/>
+          </a:fontRef>
+        </p:style>
+        <p:txBody>
+          <a:bodyPr rtlCol="0" anchor="ctr"/>
+          <a:lstStyle/>
+          <a:p>
+            <a:pPr algn="ctr"/>
+          </a:p>
+        </p:txBody>
+      </p:sp>
+      <p:sp>
+        <p:nvSpPr>
+          <p:cNvPr id="5" name="TextBox 4"/>
+          <p:cNvSpPr txBox="1"/>
+          <p:nvPr/>
+        </p:nvSpPr>
+        <p:spPr>
+          <a:xfrm>
+            <a:off x="457200" y="201168"/>
+            <a:ext cx="10972800" cy="731520"/>
+          </a:xfrm>
+          <a:prstGeom prst="rect">
+            <a:avLst/>
+          </a:prstGeom>
+          <a:noFill/>
+        </p:spPr>
+        <p:txBody>
+          <a:bodyPr wrap="square">
+            <a:spAutoFit/>
+          </a:bodyPr>
+          <a:lstStyle/>
+          <a:p>
+            <a:pPr algn="l"/>
+            <a:r>
+              <a:rPr sz="2800" b="1" i="0">
+                <a:solidFill>
+                  <a:srgbClr val="FFFFFF"/>
+                </a:solidFill>
+              </a:rPr>
+              <a:t>Who NXProject is for</a:t>
+            </a:r>
+          </a:p>
+        </p:txBody>
+      </p:sp>
+      <p:sp>
+        <p:nvSpPr>
+          <p:cNvPr id="6" name="Rectangle 5"/>
+          <p:cNvSpPr/>
+          <p:nvPr/>
+        </p:nvSpPr>
+        <p:spPr>
+          <a:xfrm>
+            <a:off x="457200" y="1554480"/>
+            <a:ext cx="2651760" cy="4663440"/>
+          </a:xfrm>
+          <a:prstGeom prst="rect">
+            <a:avLst/>
+          </a:prstGeom>
+          <a:solidFill>
+            <a:srgbClr val="FFFFFF"/>
+          </a:solidFill>
+          <a:ln>
+            <a:solidFill>
+              <a:srgbClr val="FFFFFF"/>
+            </a:solidFill>
+          </a:ln>
+        </p:spPr>
+        <p:style>
+          <a:lnRef idx="1">
+            <a:schemeClr val="accent1"/>
+          </a:lnRef>
+          <a:fillRef idx="3">
+            <a:schemeClr val="accent1"/>
+          </a:fillRef>
+          <a:effectRef idx="2">
+            <a:schemeClr val="accent1"/>
+          </a:effectRef>
+          <a:fontRef idx="minor">
+            <a:schemeClr val="lt1"/>
+          </a:fontRef>
+        </p:style>
+        <p:txBody>
+          <a:bodyPr rtlCol="0" anchor="ctr"/>
+          <a:lstStyle/>
+          <a:p>
+            <a:pPr algn="ctr"/>
+          </a:p>
+        </p:txBody>
+      </p:sp>
+      <p:sp>
+        <p:nvSpPr>
+          <p:cNvPr id="7" name="Rectangle 6"/>
+          <p:cNvSpPr/>
+          <p:nvPr/>
+        </p:nvSpPr>
+        <p:spPr>
+          <a:xfrm>
+            <a:off x="457200" y="1554480"/>
+            <a:ext cx="2651760" cy="54864"/>
+          </a:xfrm>
+          <a:prstGeom prst="rect">
+            <a:avLst/>
+          </a:prstGeom>
+          <a:solidFill>
+            <a:srgbClr val="E87B00"/>
+          </a:solidFill>
+          <a:ln>
+            <a:solidFill>
+              <a:srgbClr val="E87B00"/>
+            </a:solidFill>
+          </a:ln>
+        </p:spPr>
+        <p:style>
+          <a:lnRef idx="1">
+            <a:schemeClr val="accent1"/>
+          </a:lnRef>
+          <a:fillRef idx="3">
+            <a:schemeClr val="accent1"/>
+          </a:fillRef>
+          <a:effectRef idx="2">
+            <a:schemeClr val="accent1"/>
+          </a:effectRef>
+          <a:fontRef idx="minor">
+            <a:schemeClr val="lt1"/>
+          </a:fontRef>
+        </p:style>
+        <p:txBody>
+          <a:bodyPr rtlCol="0" anchor="ctr"/>
+          <a:lstStyle/>
+          <a:p>
+            <a:pPr algn="ctr"/>
+          </a:p>
+        </p:txBody>
+      </p:sp>
+      <p:sp>
+        <p:nvSpPr>
+          <p:cNvPr id="8" name="TextBox 7"/>
+          <p:cNvSpPr txBox="1"/>
+          <p:nvPr/>
+        </p:nvSpPr>
+        <p:spPr>
+          <a:xfrm>
+            <a:off x="457200" y="1737360"/>
+            <a:ext cx="2651760" cy="640080"/>
+          </a:xfrm>
+          <a:prstGeom prst="rect">
+            <a:avLst/>
+          </a:prstGeom>
+          <a:noFill/>
+        </p:spPr>
+        <p:txBody>
+          <a:bodyPr wrap="square">
+            <a:spAutoFit/>
+          </a:bodyPr>
+          <a:lstStyle/>
+          <a:p>
+            <a:pPr algn="ctr"/>
+            <a:r>
+              <a:rPr sz="3400" b="0" i="0">
+                <a:solidFill>
+                  <a:srgbClr val="2D2D2D"/>
+                </a:solidFill>
+              </a:rPr>
+              <a:t>🧑‍💼</a:t>
+            </a:r>
+          </a:p>
+        </p:txBody>
+      </p:sp>
+      <p:sp>
+        <p:nvSpPr>
+          <p:cNvPr id="9" name="TextBox 8"/>
+          <p:cNvSpPr txBox="1"/>
+          <p:nvPr/>
+        </p:nvSpPr>
+        <p:spPr>
+          <a:xfrm>
+            <a:off x="548640" y="2468880"/>
+            <a:ext cx="2468880" cy="731520"/>
+          </a:xfrm>
+          <a:prstGeom prst="rect">
+            <a:avLst/>
+          </a:prstGeom>
+          <a:noFill/>
+        </p:spPr>
+        <p:txBody>
+          <a:bodyPr wrap="square">
+            <a:spAutoFit/>
+          </a:bodyPr>
+          <a:lstStyle/>
+          <a:p>
+            <a:pPr algn="ctr"/>
+            <a:r>
+              <a:rPr sz="1400" b="1" i="0">
+                <a:solidFill>
+                  <a:srgbClr val="1A3A6B"/>
+                </a:solidFill>
+              </a:rPr>
+              <a:t>Project
+Manager</a:t>
+            </a:r>
+          </a:p>
+        </p:txBody>
+      </p:sp>
+      <p:sp>
+        <p:nvSpPr>
+          <p:cNvPr id="10" name="TextBox 9"/>
+          <p:cNvSpPr txBox="1"/>
+          <p:nvPr/>
+        </p:nvSpPr>
+        <p:spPr>
+          <a:xfrm>
+            <a:off x="594360" y="3291840"/>
+            <a:ext cx="2377440" cy="2743200"/>
+          </a:xfrm>
+          <a:prstGeom prst="rect">
+            <a:avLst/>
+          </a:prstGeom>
+          <a:noFill/>
+        </p:spPr>
+        <p:txBody>
+          <a:bodyPr wrap="square">
+            <a:spAutoFit/>
+          </a:bodyPr>
+          <a:lstStyle/>
+          <a:p>
+            <a:pPr algn="ctr"/>
+            <a:r>
+              <a:rPr sz="1100" b="0" i="0">
+                <a:solidFill>
+                  <a:srgbClr val="555F6E"/>
+                </a:solidFill>
+              </a:rPr>
+              <a:t>Schedule integrated with the backlog, delay alerts, dependency view and negotiated dates.</a:t>
+            </a:r>
+          </a:p>
+        </p:txBody>
+      </p:sp>
+      <p:sp>
+        <p:nvSpPr>
+          <p:cNvPr id="11" name="Rectangle 10"/>
+          <p:cNvSpPr/>
+          <p:nvPr/>
+        </p:nvSpPr>
+        <p:spPr>
+          <a:xfrm>
+            <a:off x="3383280" y="1554480"/>
+            <a:ext cx="2651760" cy="4663440"/>
+          </a:xfrm>
+          <a:prstGeom prst="rect">
+            <a:avLst/>
+          </a:prstGeom>
+          <a:solidFill>
+            <a:srgbClr val="FFFFFF"/>
+          </a:solidFill>
+          <a:ln>
+            <a:solidFill>
+              <a:srgbClr val="FFFFFF"/>
+            </a:solidFill>
+          </a:ln>
+        </p:spPr>
+        <p:style>
+          <a:lnRef idx="1">
+            <a:schemeClr val="accent1"/>
+          </a:lnRef>
+          <a:fillRef idx="3">
+            <a:schemeClr val="accent1"/>
+          </a:fillRef>
+          <a:effectRef idx="2">
+            <a:schemeClr val="accent1"/>
+          </a:effectRef>
+          <a:fontRef idx="minor">
+            <a:schemeClr val="lt1"/>
+          </a:fontRef>
+        </p:style>
+        <p:txBody>
+          <a:bodyPr rtlCol="0" anchor="ctr"/>
+          <a:lstStyle/>
+          <a:p>
+            <a:pPr algn="ctr"/>
+          </a:p>
+        </p:txBody>
+      </p:sp>
+      <p:sp>
+        <p:nvSpPr>
+          <p:cNvPr id="12" name="Rectangle 11"/>
+          <p:cNvSpPr/>
+          <p:nvPr/>
+        </p:nvSpPr>
+        <p:spPr>
+          <a:xfrm>
+            <a:off x="3383280" y="1554480"/>
+            <a:ext cx="2651760" cy="54864"/>
+          </a:xfrm>
+          <a:prstGeom prst="rect">
+            <a:avLst/>
+          </a:prstGeom>
+          <a:solidFill>
+            <a:srgbClr val="E87B00"/>
+          </a:solidFill>
+          <a:ln>
+            <a:solidFill>
+              <a:srgbClr val="E87B00"/>
+            </a:solidFill>
+          </a:ln>
+        </p:spPr>
+        <p:style>
+          <a:lnRef idx="1">
+            <a:schemeClr val="accent1"/>
+          </a:lnRef>
+          <a:fillRef idx="3">
+            <a:schemeClr val="accent1"/>
+          </a:fillRef>
+          <a:effectRef idx="2">
+            <a:schemeClr val="accent1"/>
+          </a:effectRef>
+          <a:fontRef idx="minor">
+            <a:schemeClr val="lt1"/>
+          </a:fontRef>
+        </p:style>
+        <p:txBody>
+          <a:bodyPr rtlCol="0" anchor="ctr"/>
+          <a:lstStyle/>
+          <a:p>
+            <a:pPr algn="ctr"/>
+          </a:p>
+        </p:txBody>
+      </p:sp>
+      <p:sp>
+        <p:nvSpPr>
+          <p:cNvPr id="13" name="TextBox 12"/>
+          <p:cNvSpPr txBox="1"/>
+          <p:nvPr/>
+        </p:nvSpPr>
+        <p:spPr>
+          <a:xfrm>
+            <a:off x="3383280" y="1737360"/>
+            <a:ext cx="2651760" cy="640080"/>
+          </a:xfrm>
+          <a:prstGeom prst="rect">
+            <a:avLst/>
+          </a:prstGeom>
+          <a:noFill/>
+        </p:spPr>
+        <p:txBody>
+          <a:bodyPr wrap="square">
+            <a:spAutoFit/>
+          </a:bodyPr>
+          <a:lstStyle/>
+          <a:p>
+            <a:pPr algn="ctr"/>
+            <a:r>
+              <a:rPr sz="3400" b="0" i="0">
+                <a:solidFill>
+                  <a:srgbClr val="2D2D2D"/>
+                </a:solidFill>
+              </a:rPr>
+              <a:t>🔄</a:t>
+            </a:r>
+          </a:p>
+        </p:txBody>
+      </p:sp>
+      <p:sp>
+        <p:nvSpPr>
+          <p:cNvPr id="14" name="TextBox 13"/>
+          <p:cNvSpPr txBox="1"/>
+          <p:nvPr/>
+        </p:nvSpPr>
+        <p:spPr>
+          <a:xfrm>
+            <a:off x="3474720" y="2468880"/>
+            <a:ext cx="2468880" cy="731520"/>
+          </a:xfrm>
+          <a:prstGeom prst="rect">
+            <a:avLst/>
+          </a:prstGeom>
+          <a:noFill/>
+        </p:spPr>
+        <p:txBody>
+          <a:bodyPr wrap="square">
+            <a:spAutoFit/>
+          </a:bodyPr>
+          <a:lstStyle/>
+          <a:p>
+            <a:pPr algn="ctr"/>
+            <a:r>
+              <a:rPr sz="1400" b="1" i="0">
+                <a:solidFill>
+                  <a:srgbClr val="1A3A6B"/>
+                </a:solidFill>
+              </a:rPr>
+              <a:t>Scrum Master
+/ RTE</a:t>
+            </a:r>
+          </a:p>
+        </p:txBody>
+      </p:sp>
+      <p:sp>
+        <p:nvSpPr>
+          <p:cNvPr id="15" name="TextBox 14"/>
+          <p:cNvSpPr txBox="1"/>
+          <p:nvPr/>
+        </p:nvSpPr>
+        <p:spPr>
+          <a:xfrm>
+            <a:off x="3520440" y="3291840"/>
+            <a:ext cx="2377440" cy="2743200"/>
+          </a:xfrm>
+          <a:prstGeom prst="rect">
+            <a:avLst/>
+          </a:prstGeom>
+          <a:noFill/>
+        </p:spPr>
+        <p:txBody>
+          <a:bodyPr wrap="square">
+            <a:spAutoFit/>
+          </a:bodyPr>
+          <a:lstStyle/>
+          <a:p>
+            <a:pPr algn="ctr"/>
+            <a:r>
+              <a:rPr sz="1100" b="0" i="0">
+                <a:solidFill>
+                  <a:srgbClr val="555F6E"/>
+                </a:solidFill>
+              </a:rPr>
+              <a:t>Sprint capacity, allocation conflicts, change impact and automatic cascade.</a:t>
+            </a:r>
+          </a:p>
+        </p:txBody>
+      </p:sp>
+      <p:sp>
+        <p:nvSpPr>
+          <p:cNvPr id="16" name="Rectangle 15"/>
+          <p:cNvSpPr/>
+          <p:nvPr/>
+        </p:nvSpPr>
+        <p:spPr>
+          <a:xfrm>
+            <a:off x="6309360" y="1554480"/>
+            <a:ext cx="2651760" cy="4663440"/>
+          </a:xfrm>
+          <a:prstGeom prst="rect">
+            <a:avLst/>
+          </a:prstGeom>
+          <a:solidFill>
+            <a:srgbClr val="FFFFFF"/>
+          </a:solidFill>
+          <a:ln>
+            <a:solidFill>
+              <a:srgbClr val="FFFFFF"/>
+            </a:solidFill>
+          </a:ln>
+        </p:spPr>
+        <p:style>
+          <a:lnRef idx="1">
+            <a:schemeClr val="accent1"/>
+          </a:lnRef>
+          <a:fillRef idx="3">
+            <a:schemeClr val="accent1"/>
+          </a:fillRef>
+          <a:effectRef idx="2">
+            <a:schemeClr val="accent1"/>
+          </a:effectRef>
+          <a:fontRef idx="minor">
+            <a:schemeClr val="lt1"/>
+          </a:fontRef>
+        </p:style>
+        <p:txBody>
+          <a:bodyPr rtlCol="0" anchor="ctr"/>
+          <a:lstStyle/>
+          <a:p>
+            <a:pPr algn="ctr"/>
+          </a:p>
+        </p:txBody>
+      </p:sp>
+      <p:sp>
+        <p:nvSpPr>
+          <p:cNvPr id="17" name="Rectangle 16"/>
+          <p:cNvSpPr/>
+          <p:nvPr/>
+        </p:nvSpPr>
+        <p:spPr>
+          <a:xfrm>
+            <a:off x="6309360" y="1554480"/>
+            <a:ext cx="2651760" cy="54864"/>
+          </a:xfrm>
+          <a:prstGeom prst="rect">
+            <a:avLst/>
+          </a:prstGeom>
+          <a:solidFill>
+            <a:srgbClr val="E87B00"/>
+          </a:solidFill>
+          <a:ln>
+            <a:solidFill>
+              <a:srgbClr val="E87B00"/>
+            </a:solidFill>
+          </a:ln>
+        </p:spPr>
+        <p:style>
+          <a:lnRef idx="1">
+            <a:schemeClr val="accent1"/>
+          </a:lnRef>
+          <a:fillRef idx="3">
+            <a:schemeClr val="accent1"/>
+          </a:fillRef>
+          <a:effectRef idx="2">
+            <a:schemeClr val="accent1"/>
+          </a:effectRef>
+          <a:fontRef idx="minor">
+            <a:schemeClr val="lt1"/>
+          </a:fontRef>
+        </p:style>
+        <p:txBody>
+          <a:bodyPr rtlCol="0" anchor="ctr"/>
+          <a:lstStyle/>
+          <a:p>
+            <a:pPr algn="ctr"/>
+          </a:p>
+        </p:txBody>
+      </p:sp>
+      <p:sp>
+        <p:nvSpPr>
+          <p:cNvPr id="18" name="TextBox 17"/>
+          <p:cNvSpPr txBox="1"/>
+          <p:nvPr/>
+        </p:nvSpPr>
+        <p:spPr>
+          <a:xfrm>
+            <a:off x="6309360" y="1737360"/>
+            <a:ext cx="2651760" cy="640080"/>
+          </a:xfrm>
+          <a:prstGeom prst="rect">
+            <a:avLst/>
+          </a:prstGeom>
+          <a:noFill/>
+        </p:spPr>
+        <p:txBody>
+          <a:bodyPr wrap="square">
+            <a:spAutoFit/>
+          </a:bodyPr>
+          <a:lstStyle/>
+          <a:p>
+            <a:pPr algn="ctr"/>
+            <a:r>
+              <a:rPr sz="3400" b="0" i="0">
+                <a:solidFill>
+                  <a:srgbClr val="2D2D2D"/>
+                </a:solidFill>
+              </a:rPr>
+              <a:t>💻</a:t>
+            </a:r>
+          </a:p>
+        </p:txBody>
+      </p:sp>
+      <p:sp>
+        <p:nvSpPr>
+          <p:cNvPr id="19" name="TextBox 18"/>
+          <p:cNvSpPr txBox="1"/>
+          <p:nvPr/>
+        </p:nvSpPr>
+        <p:spPr>
+          <a:xfrm>
+            <a:off x="6400800" y="2468880"/>
+            <a:ext cx="2468880" cy="731520"/>
+          </a:xfrm>
+          <a:prstGeom prst="rect">
+            <a:avLst/>
+          </a:prstGeom>
+          <a:noFill/>
+        </p:spPr>
+        <p:txBody>
+          <a:bodyPr wrap="square">
+            <a:spAutoFit/>
+          </a:bodyPr>
+          <a:lstStyle/>
+          <a:p>
+            <a:pPr algn="ctr"/>
+            <a:r>
+              <a:rPr sz="1400" b="1" i="0">
+                <a:solidFill>
+                  <a:srgbClr val="1A3A6B"/>
+                </a:solidFill>
+              </a:rPr>
+              <a:t>Tech Lead</a:t>
+            </a:r>
+          </a:p>
+        </p:txBody>
+      </p:sp>
+      <p:sp>
+        <p:nvSpPr>
+          <p:cNvPr id="20" name="TextBox 19"/>
+          <p:cNvSpPr txBox="1"/>
+          <p:nvPr/>
+        </p:nvSpPr>
+        <p:spPr>
+          <a:xfrm>
+            <a:off x="6446520" y="3291840"/>
+            <a:ext cx="2377440" cy="2743200"/>
+          </a:xfrm>
+          <a:prstGeom prst="rect">
+            <a:avLst/>
+          </a:prstGeom>
+          <a:noFill/>
+        </p:spPr>
+        <p:txBody>
+          <a:bodyPr wrap="square">
+            <a:spAutoFit/>
+          </a:bodyPr>
+          <a:lstStyle/>
+          <a:p>
+            <a:pPr algn="ctr"/>
+            <a:r>
+              <a:rPr sz="1100" b="0" i="0">
+                <a:solidFill>
+                  <a:srgbClr val="555F6E"/>
+                </a:solidFill>
+              </a:rPr>
+              <a:t>Feature and Story view with predecessors, hour estimates and traceability.</a:t>
+            </a:r>
+          </a:p>
+        </p:txBody>
+      </p:sp>
+      <p:sp>
+        <p:nvSpPr>
+          <p:cNvPr id="21" name="Rectangle 20"/>
+          <p:cNvSpPr/>
+          <p:nvPr/>
+        </p:nvSpPr>
+        <p:spPr>
+          <a:xfrm>
+            <a:off x="9235440" y="1554480"/>
+            <a:ext cx="2651760" cy="4663440"/>
+          </a:xfrm>
+          <a:prstGeom prst="rect">
+            <a:avLst/>
+          </a:prstGeom>
+          <a:solidFill>
+            <a:srgbClr val="FFFFFF"/>
+          </a:solidFill>
+          <a:ln>
+            <a:solidFill>
+              <a:srgbClr val="FFFFFF"/>
+            </a:solidFill>
+          </a:ln>
+        </p:spPr>
+        <p:style>
+          <a:lnRef idx="1">
+            <a:schemeClr val="accent1"/>
+          </a:lnRef>
+          <a:fillRef idx="3">
+            <a:schemeClr val="accent1"/>
+          </a:fillRef>
+          <a:effectRef idx="2">
+            <a:schemeClr val="accent1"/>
+          </a:effectRef>
+          <a:fontRef idx="minor">
+            <a:schemeClr val="lt1"/>
+          </a:fontRef>
+        </p:style>
+        <p:txBody>
+          <a:bodyPr rtlCol="0" anchor="ctr"/>
+          <a:lstStyle/>
+          <a:p>
+            <a:pPr algn="ctr"/>
+          </a:p>
+        </p:txBody>
+      </p:sp>
+      <p:sp>
+        <p:nvSpPr>
+          <p:cNvPr id="22" name="Rectangle 21"/>
+          <p:cNvSpPr/>
+          <p:nvPr/>
+        </p:nvSpPr>
+        <p:spPr>
+          <a:xfrm>
+            <a:off x="9235440" y="1554480"/>
+            <a:ext cx="2651760" cy="54864"/>
+          </a:xfrm>
+          <a:prstGeom prst="rect">
+            <a:avLst/>
+          </a:prstGeom>
+          <a:solidFill>
+            <a:srgbClr val="E87B00"/>
+          </a:solidFill>
+          <a:ln>
+            <a:solidFill>
+              <a:srgbClr val="E87B00"/>
+            </a:solidFill>
+          </a:ln>
+        </p:spPr>
+        <p:style>
+          <a:lnRef idx="1">
+            <a:schemeClr val="accent1"/>
+          </a:lnRef>
+          <a:fillRef idx="3">
+            <a:schemeClr val="accent1"/>
+          </a:fillRef>
+          <a:effectRef idx="2">
+            <a:schemeClr val="accent1"/>
+          </a:effectRef>
+          <a:fontRef idx="minor">
+            <a:schemeClr val="lt1"/>
+          </a:fontRef>
+        </p:style>
+        <p:txBody>
+          <a:bodyPr rtlCol="0" anchor="ctr"/>
+          <a:lstStyle/>
+          <a:p>
+            <a:pPr algn="ctr"/>
+          </a:p>
+        </p:txBody>
+      </p:sp>
+      <p:sp>
+        <p:nvSpPr>
+          <p:cNvPr id="23" name="TextBox 22"/>
+          <p:cNvSpPr txBox="1"/>
+          <p:nvPr/>
+        </p:nvSpPr>
+        <p:spPr>
+          <a:xfrm>
+            <a:off x="9235440" y="1737360"/>
+            <a:ext cx="2651760" cy="640080"/>
+          </a:xfrm>
+          <a:prstGeom prst="rect">
+            <a:avLst/>
+          </a:prstGeom>
+          <a:noFill/>
+        </p:spPr>
+        <p:txBody>
+          <a:bodyPr wrap="square">
+            <a:spAutoFit/>
+          </a:bodyPr>
+          <a:lstStyle/>
+          <a:p>
+            <a:pPr algn="ctr"/>
+            <a:r>
+              <a:rPr sz="3400" b="0" i="0">
+                <a:solidFill>
+                  <a:srgbClr val="2D2D2D"/>
+                </a:solidFill>
+              </a:rPr>
+              <a:t>📊</a:t>
+            </a:r>
+          </a:p>
+        </p:txBody>
+      </p:sp>
+      <p:sp>
+        <p:nvSpPr>
+          <p:cNvPr id="24" name="TextBox 23"/>
+          <p:cNvSpPr txBox="1"/>
+          <p:nvPr/>
+        </p:nvSpPr>
+        <p:spPr>
+          <a:xfrm>
+            <a:off x="9326880" y="2468880"/>
+            <a:ext cx="2468880" cy="731520"/>
+          </a:xfrm>
+          <a:prstGeom prst="rect">
+            <a:avLst/>
+          </a:prstGeom>
+          <a:noFill/>
+        </p:spPr>
+        <p:txBody>
+          <a:bodyPr wrap="square">
+            <a:spAutoFit/>
+          </a:bodyPr>
+          <a:lstStyle/>
+          <a:p>
+            <a:pPr algn="ctr"/>
+            <a:r>
+              <a:rPr sz="1400" b="1" i="0">
+                <a:solidFill>
+                  <a:srgbClr val="1A3A6B"/>
+                </a:solidFill>
+              </a:rPr>
+              <a:t>Management
+/ PMO</a:t>
+            </a:r>
+          </a:p>
+        </p:txBody>
+      </p:sp>
+      <p:sp>
+        <p:nvSpPr>
+          <p:cNvPr id="25" name="TextBox 24"/>
+          <p:cNvSpPr txBox="1"/>
+          <p:nvPr/>
+        </p:nvSpPr>
+        <p:spPr>
+          <a:xfrm>
+            <a:off x="9372600" y="3291840"/>
+            <a:ext cx="2377440" cy="2743200"/>
+          </a:xfrm>
+          <a:prstGeom prst="rect">
+            <a:avLst/>
+          </a:prstGeom>
+          <a:noFill/>
+        </p:spPr>
+        <p:txBody>
+          <a:bodyPr wrap="square">
+            <a:spAutoFit/>
+          </a:bodyPr>
+          <a:lstStyle/>
+          <a:p>
+            <a:pPr algn="ctr"/>
+            <a:r>
+              <a:rPr sz="1100" b="0" i="0">
+                <a:solidFill>
+                  <a:srgbClr val="555F6E"/>
+                </a:solidFill>
+              </a:rPr>
+              <a:t>Consolidated portfolio view, export to MS Project/Excel and executive Health Check.</a:t>
+            </a:r>
+          </a:p>
+        </p:txBody>
+      </p:sp>
+    </p:spTree>
+  </p:cSld>
+  <p:clrMapOvr>
+    <a:masterClrMapping/>
+  </p:clrMapOvr>
+</p:sld>
+</file>
+
+<file path=ppt/slides/slide9.xml><?xml version="1.0" encoding="utf-8"?>
 <p:sld xmlns:a="http://schemas.openxmlformats.org/drawingml/2006/main" xmlns:p="http://schemas.openxmlformats.org/presentationml/2006/main" xmlns:r="http://schemas.openxmlformats.org/officeDocument/2006/relationships">
   <p:cSld>
     <p:spTree>
